--- a/docs/deck/deck.pptx
+++ b/docs/deck/deck.pptx
@@ -4224,7 +4224,7 @@
               <a:defRPr sz="1500"/>
             </a:pPr>
             <a:r>
-              <a:t>- Typology detectors are temporal, not amount-only: structuring (≥3 sub-£10k cash in 7 days),</a:t>
+              <a:t>- Typology detectors are temporal, not amount-only — flagged on every customer *and* independently hunted by the LLM:</a:t>
             </a:r>
           </a:p>
           <a:p>

--- a/docs/deck/deck.pptx
+++ b/docs/deck/deck.pptx
@@ -506,7 +506,7 @@
           <a:lstStyle/>
           <a:p>
             <a:r>
-              <a:t>We optimise for defensible, consistent triage under regulatory scrutiny — not raw model accuracy.</a:t>
+              <a:t>We optimise for a defensible, self-improving investigation — the model does the judging, a human closes the gap, memory makes it better.</a:t>
             </a:r>
           </a:p>
         </p:txBody>
@@ -576,7 +576,7 @@
           <a:lstStyle/>
           <a:p>
             <a:r>
-              <a:t>Single-process app, six modules — rules produce the number, the LLM only cross-checks it.</a:t>
+              <a:t>Parallel specialists for speed and focus; one agentic orchestrator with tools + full context for depth; memory makes each run smarter than the last.</a:t>
             </a:r>
           </a:p>
         </p:txBody>
@@ -646,7 +646,7 @@
           <a:lstStyle/>
           <a:p>
             <a:r>
-              <a:t>Determinism and auditability are engineered in — Decimal money, seeded data, no wall-clock in predicates.</a:t>
+              <a:t>The engineering is the harness around the model — tools, memory, the confidence gate, and the trace-as-audit — not a prompt.</a:t>
             </a:r>
           </a:p>
         </p:txBody>
@@ -716,7 +716,7 @@
           <a:lstStyle/>
           <a:p>
             <a:r>
-              <a:t>The interesting engineering is the guardrails — making a non-deterministic model safe inside a deterministic, auditable pipeline.</a:t>
+              <a:t>The interesting problem is making an autonomous investigator safe and auditable without a deterministic backstop.</a:t>
             </a:r>
           </a:p>
         </p:txBody>
@@ -786,7 +786,7 @@
           <a:lstStyle/>
           <a:p>
             <a:r>
-              <a:t>The POC proves the safe pipeline end-to-end; production is swapping fixtures for live feeds and closing the analyst feedback loop.</a:t>
+              <a:t>The POC proves the agentic loop + layered memory end-to-end; production is vector memory, live feeds, and tuned confidence.</a:t>
             </a:r>
           </a:p>
         </p:txBody>
@@ -3849,7 +3849,7 @@
               <a:defRPr sz="1500"/>
             </a:pPr>
             <a:r>
-              <a:t>- Compliance analysts triage fragmented signals (KYC, transactions, sanctions/PEP, adverse media)</a:t>
+              <a:t>- Compliance analysts triage fragmented signals (KYC, account, transactions, external alerts) under</a:t>
             </a:r>
           </a:p>
           <a:p>
@@ -3857,7 +3857,7 @@
               <a:defRPr sz="1500"/>
             </a:pPr>
             <a:r>
-              <a:t>- Objective: join per-customer signals into one dossier, score them **deterministically and</a:t>
+              <a:t>- Objective: join each customer's fragmented signals into one dossier, score and prioritise them,</a:t>
             </a:r>
           </a:p>
           <a:p>
@@ -3865,7 +3865,7 @@
               <a:defRPr sz="1500"/>
             </a:pPr>
             <a:r>
-              <a:t>- Design tension: a false negative (a missed sanctioned entity) is catastrophic; a false positive</a:t>
+              <a:t>- Design tension: a false negative is catastrophic, a false positive is expensive, and the reasoning</a:t>
             </a:r>
           </a:p>
           <a:p>
@@ -3873,7 +3873,7 @@
               <a:defRPr sz="1500"/>
             </a:pPr>
             <a:r>
-              <a:t>- North star: a *never-fails* engine — rules are the source of truth, the LLM is an advisory</a:t>
+              <a:t>- North star: a *fully-LLM, agentic* investigator that reads the whole dossier, is **honest about its</a:t>
             </a:r>
           </a:p>
         </p:txBody>
@@ -3904,7 +3904,7 @@
               <a:defRPr sz="1100" i="1"/>
             </a:pPr>
             <a:r>
-              <a:t>Note: We optimise for defensible, consistent triage under regulatory scrutiny — not raw model accuracy.</a:t>
+              <a:t>Note: We optimise for a defensible, self-improving investigation — the model does the judging, a human closes the gap, memory makes it better.</a:t>
             </a:r>
           </a:p>
         </p:txBody>
@@ -3984,7 +3984,7 @@
               <a:defRPr sz="1500"/>
             </a:pPr>
             <a:r>
-              <a:t>- Per-customer flow: dossier → rules score/band/findings → independent LLM score/confidence/</a:t>
+              <a:t>- Per-customer flow: retrieve memory → parallel specialists → agentic orchestrator → confidence-gate →</a:t>
             </a:r>
           </a:p>
           <a:p>
@@ -3992,7 +3992,7 @@
               <a:defRPr sz="1500"/>
             </a:pPr>
             <a:r>
-              <a:t>- Invariant: the rules score is the auditable number; the LLM never writes the arithmetic.</a:t>
+              <a:t>- 5-tier memory across 3 stores: working (Redis) · per-customer (relational) · episodic (case-bank) ·</a:t>
             </a:r>
           </a:p>
         </p:txBody>
@@ -4025,87 +4025,75 @@
               </a:defRPr>
             </a:pPr>
             <a:r>
-              <a:t>  data/generate.py ─► dossiers.json ─┐</a:t>
+              <a:t>  data/customers/CUST_xxx/  (structured + unstructured)</a:t>
             </a:r>
             <a:br/>
             <a:r>
-              <a:t>  (20 seeded synthetic profiles)     │</a:t>
+              <a:t>                 │</a:t>
             </a:r>
             <a:br/>
             <a:r>
-              <a:t>                                     ▼</a:t>
+              <a:t>                 ▼</a:t>
             </a:r>
             <a:br/>
             <a:r>
-              <a:t>  config.py ──────►  ┌─────────────────────────────────────────────┐</a:t>
+              <a:t>   memory.retrieve  ── per-customer history (relational) · similar cases (episodic)</a:t>
             </a:r>
             <a:br/>
             <a:r>
-              <a:t>  (the tuning knob)  │              engine.py (orchestrator)         │</a:t>
+              <a:t>                 │        · semantic cheat-sheets · lessons (procedural)</a:t>
             </a:r>
             <a:br/>
             <a:r>
-              <a:t>                     │                                               │</a:t>
+              <a:t>                 ▼</a:t>
             </a:r>
             <a:br/>
             <a:r>
-              <a:t>   rules.py  ───────►│  score_customer()   SOURCE OF TRUTH           │</a:t>
+              <a:t>   3 PARALLEL specialists  (KYC · transactions · documents)  memory-fed, one call each</a:t>
             </a:r>
             <a:br/>
             <a:r>
-              <a:t>   (deterministic)   │   overrides FIRST ─► weighted 0-100 ─► band   │</a:t>
+              <a:t>                 │  opinions</a:t>
             </a:r>
             <a:br/>
             <a:r>
-              <a:t>                     │          │                                    │</a:t>
+              <a:t>                 ▼</a:t>
             </a:r>
             <a:br/>
             <a:r>
-              <a:t>   llm.py  ─────────►│  crosscheck()  advisory, schema-locked        │</a:t>
+              <a:t>   AGENTIC ORCHESTRATOR  (serial tool-calling ReAct loop, temperature 0)</a:t>
             </a:r>
             <a:br/>
             <a:r>
-              <a:t>   (never-fails)     │   instructor+pydantic, temp 0, retry x3       │</a:t>
+              <a:t>     read_kyc · query/aggregate_transactions · find_txn_patterns (advisory)</a:t>
             </a:r>
             <a:br/>
             <a:r>
-              <a:t>                     │   └─ try/except ─► rules-only fallback        │</a:t>
+              <a:t>     · read_document · note/read_notes (Redis scratchpad) · finalize</a:t>
             </a:r>
             <a:br/>
             <a:r>
-              <a:t>                     │          │                                    │</a:t>
+              <a:t>                 │  RiskFinding (score/band/confidence/evidence)</a:t>
             </a:r>
             <a:br/>
             <a:r>
-              <a:t>                     │  reconcile(confidence) = 1-|rules-llm|/100    │</a:t>
+              <a:t>                 ▼</a:t>
             </a:r>
             <a:br/>
             <a:r>
-              <a:t>                     │  route()  kill-switch ─► band thresholds      │</a:t>
+              <a:t>   route_llm  ── confidence &lt; 0.60 ─► Redis review queue ─► Human panel ─► correction</a:t>
             </a:r>
             <a:br/>
             <a:r>
-              <a:t>                     └───────────────┬───────────────────────────────┘</a:t>
+              <a:t>                 │                                                  │ (human-verified episode + lessons)</a:t>
             </a:r>
             <a:br/>
             <a:r>
-              <a:t>                        drivers (sum │ to score)      ▼</a:t>
+              <a:t>                 ▼                                                  └─────────────► memory (write-back)</a:t>
             </a:r>
             <a:br/>
             <a:r>
-              <a:t>                        for explain  │        audit.py (append-only,</a:t>
-            </a:r>
-            <a:br/>
-            <a:r>
-              <a:t>                                     ▼        sha256 fingerprint)</a:t>
-            </a:r>
-            <a:br/>
-            <a:r>
-              <a:t>                            src/app/ (Streamlit)</a:t>
-            </a:r>
-            <a:br/>
-            <a:r>
-              <a:t>                        Queue ─► Case detail ─► Audit</a:t>
+              <a:t>   SQLite store (history) · append-only audit (the TOOL-CALL TRACE) · FastAPI + JS frontend</a:t>
             </a:r>
           </a:p>
         </p:txBody>
@@ -4136,7 +4124,7 @@
               <a:defRPr sz="1100" i="1"/>
             </a:pPr>
             <a:r>
-              <a:t>Note: Single-process app, six modules — rules produce the number, the LLM only cross-checks it.</a:t>
+              <a:t>Note: Parallel specialists for speed and focus; one agentic orchestrator with tools + full context for depth; memory makes each run smarter than the last.</a:t>
             </a:r>
           </a:p>
         </p:txBody>
@@ -4216,7 +4204,7 @@
               <a:defRPr sz="1500"/>
             </a:pPr>
             <a:r>
-              <a:t>- Rules as a registry of pure functions (~stdlib, no rules-engine DSL): overrides/vetoes</a:t>
+              <a:t>- Hybrid topology: three memory-fed specialists run in parallel (fast, focused), then a single</a:t>
             </a:r>
           </a:p>
           <a:p>
@@ -4224,7 +4212,7 @@
               <a:defRPr sz="1500"/>
             </a:pPr>
             <a:r>
-              <a:t>- Typology detectors are temporal, not amount-only — flagged on every customer *and* independently hunted by the LLM:</a:t>
+              <a:t>- Tools return facts, never verdicts. find_txn_patterns surfaces typology candidates with a</a:t>
             </a:r>
           </a:p>
           <a:p>
@@ -4232,7 +4220,7 @@
               <a:defRPr sz="1500"/>
             </a:pPr>
             <a:r>
-              <a:t>- LLM boundary = instructor + Pydantic v2: Field(ge=0,le=100), Literal band, field_validator</a:t>
+              <a:t>- Layered memory: a Redis scratchpad as working memory (evicted on every exit); a relational</a:t>
             </a:r>
           </a:p>
           <a:p>
@@ -4240,7 +4228,7 @@
               <a:defRPr sz="1500"/>
             </a:pPr>
             <a:r>
-              <a:t>- Never-fails guarantee: one try/except funnels every failure (no key, network, schema-invalid)</a:t>
+              <a:t>- Confidence-gated HITL + teach-the-model loop: low confidence → Redis review queue → the reviewer's</a:t>
             </a:r>
           </a:p>
           <a:p>
@@ -4248,7 +4236,7 @@
               <a:defRPr sz="1500"/>
             </a:pPr>
             <a:r>
-              <a:t>- Explainability = additive drivers that sum exactly to the score (hand-rolled SHAP local-accuracy,</a:t>
+              <a:t>- Auditability without arithmetic drivers: the ordered tool-call trace + evidence_refs +</a:t>
             </a:r>
           </a:p>
           <a:p>
@@ -4256,7 +4244,7 @@
               <a:defRPr sz="1500"/>
             </a:pPr>
             <a:r>
-              <a:t>- Audit: append-only AuditRecord per decision with sha256 input fingerprint + config snapshot.</a:t>
+              <a:t>- Reliability as loop hygiene: citation-check on evidence; a bounded loop / exception routes to a human</a:t>
             </a:r>
           </a:p>
         </p:txBody>
@@ -4287,7 +4275,7 @@
               <a:defRPr sz="1100" i="1"/>
             </a:pPr>
             <a:r>
-              <a:t>Note: Determinism and auditability are engineered in — Decimal money, seeded data, no wall-clock in predicates.</a:t>
+              <a:t>Note: The engineering is the harness around the model — tools, memory, the confidence gate, and the trace-as-audit — not a prompt.</a:t>
             </a:r>
           </a:p>
         </p:txBody>
@@ -4367,7 +4355,7 @@
               <a:defRPr sz="1500"/>
             </a:pPr>
             <a:r>
-              <a:t>- False-positive vs false-negative: we bias toward escalation — the rules-only and low-confidence</a:t>
+              <a:t>- Removing the deterministic safety net: the earlier design used rules as the source of truth. Going</a:t>
             </a:r>
           </a:p>
           <a:p>
@@ -4375,7 +4363,7 @@
               <a:defRPr sz="1500"/>
             </a:pPr>
             <a:r>
-              <a:t>- LLM non-determinism → deterministic guardrails: an LLM can hallucinate a score, so it is</a:t>
+              <a:t>- Echo-chamber risk: if the system learns from its own outputs, mistakes compound. We draw episodic</a:t>
             </a:r>
           </a:p>
           <a:p>
@@ -4383,7 +4371,7 @@
               <a:defRPr sz="1500"/>
             </a:pPr>
             <a:r>
-              <a:t>- Explainability is a hard requirement, not a nice-to-have: regulators inspect *closures* too, so</a:t>
+              <a:t>- Serial vs parallel: most models emit parallel tool calls; we force serial (parallel_tool_calls=False)</a:t>
             </a:r>
           </a:p>
           <a:p>
@@ -4391,7 +4379,7 @@
               <a:defRPr sz="1500"/>
             </a:pPr>
             <a:r>
-              <a:t>- Calibration is a first-class surface: all weights, floors, windows, bands, and routing</a:t>
+              <a:t>- Reproducibility: a fully-LLM score isn't byte-identical run-to-run. We set temperature=0 and **log</a:t>
             </a:r>
           </a:p>
           <a:p>
@@ -4399,7 +4387,7 @@
               <a:defRPr sz="1500"/>
             </a:pPr>
             <a:r>
-              <a:t>- Honest reflection: offline the "second opinion" is a *deterministic simulation*, clearly labelled</a:t>
+              <a:t>- Scoping to the brief: sanctions and adverse-media were deliberately cut — the brief names only</a:t>
             </a:r>
           </a:p>
         </p:txBody>
@@ -4430,7 +4418,7 @@
               <a:defRPr sz="1100" i="1"/>
             </a:pPr>
             <a:r>
-              <a:t>Note: The interesting engineering is the guardrails — making a non-deterministic model safe inside a deterministic, auditable pipeline.</a:t>
+              <a:t>Note: The interesting problem is making an autonomous investigator safe and auditable without a deterministic backstop.</a:t>
             </a:r>
           </a:p>
         </p:txBody>
@@ -4510,7 +4498,7 @@
               <a:defRPr sz="1500"/>
             </a:pPr>
             <a:r>
-              <a:t>- End-to-end demo: generate 20 dossiers → ranked triage Queue (risk bars) → Case detail</a:t>
+              <a:t>- End-to-end demo: the dashboard ranks 20 customers (gauges, confidence, pattern chips + charts); open a</a:t>
             </a:r>
           </a:p>
           <a:p>
@@ -4518,7 +4506,7 @@
               <a:defRPr sz="1500"/>
             </a:pPr>
             <a:r>
-              <a:t>- Worked contrast: CUST_018 (Iranian arms dealer, exact OFAC match + structuring) →</a:t>
+              <a:t>- Worked contrast: CUST_018 (Iranian arms dealer) → the agent runs read_kyc → query_transactions →</a:t>
             </a:r>
           </a:p>
           <a:p>
@@ -4534,7 +4522,7 @@
               <a:defRPr sz="1300"/>
             </a:pPr>
             <a:r>
-              <a:t>    - Real adverse-media / sanctions API feeds (World-Check, OFAC, Dow Jones) replacing fixtures.</a:t>
+              <a:t>    - Vector-embedding episodic recall (drop-in behind the case-bank's similar()), + per-customer change alerts.</a:t>
             </a:r>
           </a:p>
           <a:p>
@@ -4542,7 +4530,7 @@
               <a:defRPr sz="1300"/>
             </a:pPr>
             <a:r>
-              <a:t>    - ML-tuned thresholds — calibrate weights/cutoffs against labelled outcomes instead of hand-set values.</a:t>
+              <a:t>    - Re-add external-alert feeds (sanctions / adverse-media / World-Check) as tools the agent queries.</a:t>
             </a:r>
           </a:p>
           <a:p>
@@ -4550,7 +4538,7 @@
               <a:defRPr sz="1300"/>
             </a:pPr>
             <a:r>
-              <a:t>    - Case management — assignment, SLAs, disposition history, escalation workflow.</a:t>
+              <a:t>    - Confidence calibration against labelled outcomes; richer reviewer analytics.</a:t>
             </a:r>
           </a:p>
           <a:p>
@@ -4558,7 +4546,7 @@
               <a:defRPr sz="1300"/>
             </a:pPr>
             <a:r>
-              <a:t>    - Feedback loop — analyst decisions retrain scoring and recalibrate confidence over time.</a:t>
+              <a:t>    - Case management — assignment, SLAs, escalation workflow, and a fuller reflection cadence.</a:t>
             </a:r>
           </a:p>
         </p:txBody>
@@ -4589,7 +4577,7 @@
               <a:defRPr sz="1100" i="1"/>
             </a:pPr>
             <a:r>
-              <a:t>Note: The POC proves the safe pipeline end-to-end; production is swapping fixtures for live feeds and closing the analyst feedback loop.</a:t>
+              <a:t>Note: The POC proves the agentic loop + layered memory end-to-end; production is vector memory, live feeds, and tuned confidence.</a:t>
             </a:r>
           </a:p>
         </p:txBody>

--- a/docs/deck/deck.pptx
+++ b/docs/deck/deck.pptx
@@ -787,6 +787,12 @@
           <a:p>
             <a:r>
               <a:t>Close on the trade-offs, not the wins — showing you know where it is weak is more convincing than claiming it is finished. Each next step maps to a limit named above.</a:t>
+            </a:r>
+          </a:p>
+          <a:p/>
+          <a:p>
+            <a:r>
+              <a:t>If asked about engineering decisions: no deterministic scoring · sanctions deliberately scoped out (the brief said “external alerts”) · Decimal money · seeded byte-identical data generation · append-only audit of clears as well as escalations · working-memory scratchpad evicted on every exit path.</a:t>
             </a:r>
           </a:p>
         </p:txBody>
@@ -15619,138 +15625,6 @@
                 <a:latin typeface="Inter"/>
               </a:rPr>
               <a:t>assignment, SLAs, escalation workflow, reviewer analytics</a:t>
-            </a:r>
-          </a:p>
-        </p:txBody>
-      </p:sp>
-      <p:sp>
-        <p:nvSpPr>
-          <p:cNvPr id="54" name="Rounded Rectangle 53"/>
-          <p:cNvSpPr/>
-          <p:nvPr/>
-        </p:nvSpPr>
-        <p:spPr>
-          <a:xfrm>
-            <a:off x="548640" y="5705856"/>
-            <a:ext cx="11091672" cy="749808"/>
-          </a:xfrm>
-          <a:prstGeom prst="roundRect">
-            <a:avLst>
-              <a:gd name="adj" fmla="val 6000"/>
-            </a:avLst>
-          </a:prstGeom>
-          <a:solidFill>
-            <a:srgbClr val="1A1A1D"/>
-          </a:solidFill>
-          <a:ln w="9525">
-            <a:solidFill>
-              <a:srgbClr val="E4E4E7"/>
-            </a:solidFill>
-          </a:ln>
-          <a:effectLst/>
-        </p:spPr>
-        <p:style>
-          <a:lnRef idx="1">
-            <a:schemeClr val="accent1"/>
-          </a:lnRef>
-          <a:fillRef idx="3">
-            <a:schemeClr val="accent1"/>
-          </a:fillRef>
-          <a:effectRef idx="2">
-            <a:schemeClr val="accent1"/>
-          </a:effectRef>
-          <a:fontRef idx="minor">
-            <a:schemeClr val="lt1"/>
-          </a:fontRef>
-        </p:style>
-        <p:txBody>
-          <a:bodyPr rtlCol="0" anchor="ctr"/>
-          <a:lstStyle/>
-          <a:p>
-            <a:pPr algn="ctr"/>
-          </a:p>
-        </p:txBody>
-      </p:sp>
-      <p:sp>
-        <p:nvSpPr>
-          <p:cNvPr id="55" name="TextBox 54"/>
-          <p:cNvSpPr txBox="1"/>
-          <p:nvPr/>
-        </p:nvSpPr>
-        <p:spPr>
-          <a:xfrm>
-            <a:off x="749808" y="5797296"/>
-            <a:ext cx="10698480" cy="219456"/>
-          </a:xfrm>
-          <a:prstGeom prst="rect">
-            <a:avLst/>
-          </a:prstGeom>
-          <a:noFill/>
-        </p:spPr>
-        <p:txBody>
-          <a:bodyPr wrap="square" lIns="0" rIns="0" tIns="0" bIns="0">
-            <a:spAutoFit/>
-          </a:bodyPr>
-          <a:lstStyle/>
-          <a:p>
-            <a:pPr algn="l">
-              <a:lnSpc>
-                <a:spcPct val="125000"/>
-              </a:lnSpc>
-              <a:spcAft>
-                <a:spcPts val="600"/>
-              </a:spcAft>
-            </a:pPr>
-            <a:r>
-              <a:rPr sz="900" b="1">
-                <a:solidFill>
-                  <a:srgbClr val="71717A"/>
-                </a:solidFill>
-                <a:latin typeface="Inter"/>
-              </a:rPr>
-              <a:t>ENGINEERING DECISIONS WORTH DEFENDING</a:t>
-            </a:r>
-          </a:p>
-        </p:txBody>
-      </p:sp>
-      <p:sp>
-        <p:nvSpPr>
-          <p:cNvPr id="56" name="TextBox 55"/>
-          <p:cNvSpPr txBox="1"/>
-          <p:nvPr/>
-        </p:nvSpPr>
-        <p:spPr>
-          <a:xfrm>
-            <a:off x="749808" y="6016752"/>
-            <a:ext cx="10698480" cy="365760"/>
-          </a:xfrm>
-          <a:prstGeom prst="rect">
-            <a:avLst/>
-          </a:prstGeom>
-          <a:noFill/>
-        </p:spPr>
-        <p:txBody>
-          <a:bodyPr wrap="square" lIns="0" rIns="0" tIns="0" bIns="0">
-            <a:spAutoFit/>
-          </a:bodyPr>
-          <a:lstStyle/>
-          <a:p>
-            <a:pPr algn="l">
-              <a:lnSpc>
-                <a:spcPct val="120000"/>
-              </a:lnSpc>
-              <a:spcAft>
-                <a:spcPts val="600"/>
-              </a:spcAft>
-            </a:pPr>
-            <a:r>
-              <a:rPr sz="950" b="0">
-                <a:solidFill>
-                  <a:srgbClr val="A1A1AA"/>
-                </a:solidFill>
-                <a:latin typeface="Inter"/>
-              </a:rPr>
-              <a:t>No deterministic scoring · sanctions deliberately scoped out (the brief said “external alerts”) · Decimal money · seeded byte-identical data generation · append-only audit of clears as well as escalations · working-memory scratchpad evicted on every exit path</a:t>
             </a:r>
           </a:p>
         </p:txBody>

--- a/docs/deck/deck.pptx
+++ b/docs/deck/deck.pptx
@@ -506,7 +506,7 @@
           <a:lstStyle/>
           <a:p>
             <a:r>
-              <a:t>Lead with the analyst's desk, not the tech. The numbers establish this is a triage and explainability problem, not a detection problem. Everything in the next four slides answers one of the three failures.</a:t>
+              <a:t>Lead with the reviewer's desk, not the tech. The numbers establish this is a sorting and explaining problem, not a spotting problem. Everything in the next four slides answers one of the three things that go wrong.</a:t>
             </a:r>
           </a:p>
         </p:txBody>
@@ -576,7 +576,7 @@
           <a:lstStyle/>
           <a:p>
             <a:r>
-              <a:t>The two-topology split is the core architectural claim — parallel where independent, serial where dependent. The memory table is the second claim: state outlives the request.</a:t>
+              <a:t>The split — a team working at once, then one lead working step by step — is the core architectural claim. The memory table is the second: what it learns outlives the request.</a:t>
             </a:r>
           </a:p>
         </p:txBody>
@@ -646,7 +646,7 @@
           <a:lstStyle/>
           <a:p>
             <a:r>
-              <a:t>Walk the trace. This is 'show your work' made concrete. Point at step 10 — the tool only suggests structuring; the agent had to accept it and cite the exact rows to claim it.</a:t>
+              <a:t>Walk the steps out loud. This is 'show your working' made real. Point at step 10 — the tool only says something looks odd; the AI had to agree and name the exact payments.</a:t>
             </a:r>
           </a:p>
         </p:txBody>
@@ -716,7 +716,7 @@
           <a:lstStyle/>
           <a:p>
             <a:r>
-              <a:t>This is the slide that answers 'does it improve?'. Emphasise the three paths, then the anti-echo-chamber rule — that is the detail showing the failure mode was anticipated.</a:t>
+              <a:t>This is the slide that answers 'does it get better?'. Emphasise the three paths, then the learn-only-from-people rule — that is the detail showing we saw the trap coming.</a:t>
             </a:r>
           </a:p>
         </p:txBody>
@@ -786,13 +786,19 @@
           <a:lstStyle/>
           <a:p>
             <a:r>
-              <a:t>Close on the challenges and learnings, not the wins. Showing that you found the silent failure — and that you were wrong once and the data corrected you — is more convincing than claiming it is finished.</a:t>
+              <a:t>Close on what broke and what it taught, not on the wins. Admitting you found a silent failure — and that you were wrong once and the data corrected you — lands better than claiming it is finished.</a:t>
             </a:r>
           </a:p>
           <a:p/>
           <a:p>
             <a:r>
-              <a:t>If asked about engineering decisions: no deterministic scoring · sanctions deliberately scoped out (the brief said “external alerts”) · Decimal money · seeded byte-identical data generation · append-only audit of clears as well as escalations · working-memory scratchpad evicted on every exit path.</a:t>
+              <a:t>On latency, if pressed: the 45–90s is roughly 11 AI calls one after another. Most of it is waiting on a shared public API. On dedicated infrastructure — the model hosted in-house, a smaller fast model for routine steps, cached prompts, and many customers processed side by side — the same investigation lands comfortably under 15 seconds without changing any of the logic.</a:t>
+            </a:r>
+          </a:p>
+          <a:p/>
+          <a:p>
+            <a:r>
+              <a:t>If asked about engineering choices: no hard-coded scoring formula · watchlist screening deliberately left out of scope (the brief said “external alerts”) · exact decimal money, never floats · the test data regenerates identically every time · a permanent record of clears as well as escalations · the scratchpad is wiped on every exit path.</a:t>
             </a:r>
           </a:p>
         </p:txBody>
@@ -3887,7 +3893,7 @@
                 </a:solidFill>
                 <a:latin typeface="Inter"/>
               </a:rPr>
-              <a:t>01 · PROBLEM UNDERSTANDING</a:t>
+              <a:t>01 · THE PROBLEM</a:t>
             </a:r>
           </a:p>
         </p:txBody>
@@ -3929,7 +3935,7 @@
                 </a:solidFill>
                 <a:latin typeface="Inter"/>
               </a:rPr>
-              <a:t>Compliance drowns in signals it generated itself</a:t>
+              <a:t>Too many alarms. Almost none of them real.</a:t>
             </a:r>
           </a:p>
         </p:txBody>
@@ -3971,7 +3977,7 @@
                 </a:solidFill>
                 <a:latin typeface="Inter"/>
               </a:rPr>
-              <a:t>The bottleneck is not detecting suspicious activity — it is triaging the noise, and explaining the call afterwards.</a:t>
+              <a:t>The hard part is not spotting alarms — it is sorting the real ones from the noise, and proving afterwards why you decided what you did.</a:t>
             </a:r>
           </a:p>
         </p:txBody>
@@ -4013,7 +4019,7 @@
                 </a:solidFill>
                 <a:latin typeface="Inter"/>
               </a:rPr>
-              <a:t>THE DOMAIN, IN NUMBERS</a:t>
+              <a:t>WHAT THE INDUSTRY LOOKS LIKE TODAY</a:t>
             </a:r>
           </a:p>
         </p:txBody>
@@ -4103,7 +4109,7 @@
                 </a:solidFill>
                 <a:latin typeface="Inter"/>
               </a:rPr>
-              <a:t>~90–95%</a:t>
+              <a:t>9 in 10</a:t>
             </a:r>
           </a:p>
         </p:txBody>
@@ -4145,7 +4151,7 @@
                 </a:solidFill>
                 <a:latin typeface="Inter"/>
               </a:rPr>
-              <a:t>of AML alerts are false positives</a:t>
+              <a:t>alarms turn out to be nothing</a:t>
             </a:r>
           </a:p>
         </p:txBody>
@@ -4187,7 +4193,7 @@
                 </a:solidFill>
                 <a:latin typeface="Inter"/>
               </a:rPr>
-              <a:t>the bottleneck is triage, not detection</a:t>
+              <a:t>so the real work is sorting, not spotting</a:t>
             </a:r>
           </a:p>
         </p:txBody>
@@ -4319,7 +4325,7 @@
                 </a:solidFill>
                 <a:latin typeface="Inter"/>
               </a:rPr>
-              <a:t>of alerts are actionable</a:t>
+              <a:t>of alarms are worth acting on</a:t>
             </a:r>
           </a:p>
         </p:txBody>
@@ -4361,7 +4367,7 @@
                 </a:solidFill>
                 <a:latin typeface="Inter"/>
               </a:rPr>
-              <a:t>96%+ of analyst effort produces nothing</a:t>
+              <a:t>almost all the effort leads nowhere</a:t>
             </a:r>
           </a:p>
         </p:txBody>
@@ -4493,7 +4499,7 @@
                 </a:solidFill>
                 <a:latin typeface="Inter"/>
               </a:rPr>
-              <a:t>of analyst time goes to false positives</a:t>
+              <a:t>of a reviewer's day is spent on dead ends</a:t>
             </a:r>
           </a:p>
         </p:txBody>
@@ -4535,7 +4541,7 @@
                 </a:solidFill>
                 <a:latin typeface="Inter"/>
               </a:rPr>
-              <a:t>the scarce resource is attention</a:t>
+              <a:t>the scarce thing is attention, not data</a:t>
             </a:r>
           </a:p>
         </p:txBody>
@@ -4667,7 +4673,7 @@
                 </a:solidFill>
                 <a:latin typeface="Inter"/>
               </a:rPr>
-              <a:t>of global GDP laundered annually (UNODC)</a:t>
+              <a:t>of the world's money is dirty (UN estimate)</a:t>
             </a:r>
           </a:p>
         </p:txBody>
@@ -4709,7 +4715,7 @@
                 </a:solidFill>
                 <a:latin typeface="Inter"/>
               </a:rPr>
-              <a:t>the false negatives are the costly ones</a:t>
+              <a:t>and missing one is the expensive mistake</a:t>
             </a:r>
           </a:p>
         </p:txBody>
@@ -4751,7 +4757,7 @@
                 </a:solidFill>
                 <a:latin typeface="Inter"/>
               </a:rPr>
-              <a:t>Directional industry estimates, not audited statistics — but the shape is consistent.</a:t>
+              <a:t>Rough industry figures, not audited numbers — but every source tells the same story.</a:t>
             </a:r>
           </a:p>
         </p:txBody>
@@ -4793,7 +4799,7 @@
                 </a:solidFill>
                 <a:latin typeface="Inter"/>
               </a:rPr>
-              <a:t>ONE CUSTOMER = FIVE DISCONNECTED ARTEFACTS</a:t>
+              <a:t>ONE CUSTOMER ARRIVES AS FIVE SEPARATE FILES</a:t>
             </a:r>
           </a:p>
         </p:txBody>
@@ -4883,7 +4889,7 @@
                 </a:solidFill>
                 <a:latin typeface="Consolas"/>
               </a:rPr>
-              <a:t>kyc.json</a:t>
+              <a:t>kyc.txt</a:t>
             </a:r>
           </a:p>
         </p:txBody>
@@ -4925,7 +4931,7 @@
                 </a:solidFill>
                 <a:latin typeface="Inter"/>
               </a:rPr>
-              <a:t>structured</a:t>
+              <a:t>form-like</a:t>
             </a:r>
           </a:p>
         </p:txBody>
@@ -4967,7 +4973,7 @@
                 </a:solidFill>
                 <a:latin typeface="Inter"/>
               </a:rPr>
-              <a:t>identity, occupation, PEP</a:t>
+              <a:t>who they say they are, and what they do</a:t>
             </a:r>
           </a:p>
         </p:txBody>
@@ -5057,7 +5063,7 @@
                 </a:solidFill>
                 <a:latin typeface="Consolas"/>
               </a:rPr>
-              <a:t>account.json</a:t>
+              <a:t>account.txt</a:t>
             </a:r>
           </a:p>
         </p:txBody>
@@ -5099,7 +5105,7 @@
                 </a:solidFill>
                 <a:latin typeface="Inter"/>
               </a:rPr>
-              <a:t>structured</a:t>
+              <a:t>form-like</a:t>
             </a:r>
           </a:p>
         </p:txBody>
@@ -5141,7 +5147,7 @@
                 </a:solidFill>
                 <a:latin typeface="Inter"/>
               </a:rPr>
-              <a:t>tenure, product, jurisdiction</a:t>
+              <a:t>how long they have banked here, and where</a:t>
             </a:r>
           </a:p>
         </p:txBody>
@@ -5231,7 +5237,7 @@
                 </a:solidFill>
                 <a:latin typeface="Consolas"/>
               </a:rPr>
-              <a:t>transactions.csv</a:t>
+              <a:t>transactions.txt</a:t>
             </a:r>
           </a:p>
         </p:txBody>
@@ -5273,7 +5279,7 @@
                 </a:solidFill>
                 <a:latin typeface="Inter"/>
               </a:rPr>
-              <a:t>structured</a:t>
+              <a:t>table</a:t>
             </a:r>
           </a:p>
         </p:txBody>
@@ -5315,7 +5321,7 @@
                 </a:solidFill>
                 <a:latin typeface="Inter"/>
               </a:rPr>
-              <a:t>the behaviour — 100s of rows</a:t>
+              <a:t>what they actually did — hundreds of rows</a:t>
             </a:r>
           </a:p>
         </p:txBody>
@@ -5447,7 +5453,7 @@
                 </a:solidFill>
                 <a:latin typeface="Inter"/>
               </a:rPr>
-              <a:t>free text</a:t>
+              <a:t>prose</a:t>
             </a:r>
           </a:p>
         </p:txBody>
@@ -5489,7 +5495,7 @@
                 </a:solidFill>
                 <a:latin typeface="Inter"/>
               </a:rPr>
-              <a:t>the RM's unease, in prose</a:t>
+              <a:t>their banker's gut feeling, written out</a:t>
             </a:r>
           </a:p>
         </p:txBody>
@@ -5621,7 +5627,7 @@
                 </a:solidFill>
                 <a:latin typeface="Inter"/>
               </a:rPr>
-              <a:t>free text</a:t>
+              <a:t>prose</a:t>
             </a:r>
           </a:p>
         </p:txBody>
@@ -5663,7 +5669,7 @@
                 </a:solidFill>
                 <a:latin typeface="Inter"/>
               </a:rPr>
-              <a:t>document anomalies, admissions</a:t>
+              <a:t>what the ID scan actually said</a:t>
             </a:r>
           </a:p>
         </p:txBody>
@@ -5705,7 +5711,7 @@
                 </a:solidFill>
                 <a:latin typeface="Inter"/>
               </a:rPr>
-              <a:t>The two most incriminating sources are unstructured. </a:t>
+              <a:t>The two files that give the game away are plain English. </a:t>
             </a:r>
             <a:r>
               <a:rPr sz="900" b="1">
@@ -5714,7 +5720,7 @@
                 </a:solidFill>
                 <a:latin typeface="Inter"/>
               </a:rPr>
-              <a:t>No rules engine reads them.</a:t>
+              <a:t>Traditional software cannot read them.</a:t>
             </a:r>
           </a:p>
         </p:txBody>
@@ -5756,7 +5762,7 @@
                 </a:solidFill>
                 <a:latin typeface="Inter"/>
               </a:rPr>
-              <a:t>THREE FAILURES THIS CREATES</a:t>
+              <a:t>SO THREE THINGS GO WRONG</a:t>
             </a:r>
           </a:p>
         </p:txBody>
@@ -5890,7 +5896,7 @@
                 </a:solidFill>
                 <a:latin typeface="Inter"/>
               </a:rPr>
-              <a:t>Slow</a:t>
+              <a:t>It is slow</a:t>
             </a:r>
           </a:p>
         </p:txBody>
@@ -5932,7 +5938,7 @@
                 </a:solidFill>
                 <a:latin typeface="Inter"/>
               </a:rPr>
-              <a:t>Minutes per customer — and the queue is unordered, so the riskiest case may be read last.</a:t>
+              <a:t>Minutes per customer, and nobody knows who to open first — so the worst case might be read last.</a:t>
             </a:r>
           </a:p>
         </p:txBody>
@@ -6066,7 +6072,7 @@
                 </a:solidFill>
                 <a:latin typeface="Inter"/>
               </a:rPr>
-              <a:t>Inconsistent</a:t>
+              <a:t>It is inconsistent</a:t>
             </a:r>
           </a:p>
         </p:txBody>
@@ -6108,7 +6114,7 @@
                 </a:solidFill>
                 <a:latin typeface="Inter"/>
               </a:rPr>
-              <a:t>Two analysts score the same file differently. There is no shared calibration.</a:t>
+              <a:t>Give the same file to two reviewers and you get two different answers. Nobody agrees on the yardstick.</a:t>
             </a:r>
           </a:p>
         </p:txBody>
@@ -6242,7 +6248,7 @@
                 </a:solidFill>
                 <a:latin typeface="Inter"/>
               </a:rPr>
-              <a:t>Unauditable</a:t>
+              <a:t>Nobody can explain it</a:t>
             </a:r>
           </a:p>
         </p:txBody>
@@ -6284,7 +6290,7 @@
                 </a:solidFill>
                 <a:latin typeface="Inter"/>
               </a:rPr>
-              <a:t>A regulator asking “why was this cleared?” six months later gets a shrug.</a:t>
+              <a:t>The thinking stays in someone's head. Ask six months later why a customer was let through, and you get a shrug.</a:t>
             </a:r>
           </a:p>
         </p:txBody>
@@ -6374,7 +6380,7 @@
                 </a:solidFill>
                 <a:latin typeface="Inter"/>
               </a:rPr>
-              <a:t>OBJECTIVE, AND THE CONSTRAINT THAT SHAPED EVERYTHING</a:t>
+              <a:t>WHAT WE SET OUT TO BUILD</a:t>
             </a:r>
           </a:p>
         </p:txBody>
@@ -6416,7 +6422,7 @@
                 </a:solidFill>
                 <a:latin typeface="Inter"/>
               </a:rPr>
-              <a:t>Do the first pass: </a:t>
+              <a:t>Do the first pass. </a:t>
             </a:r>
             <a:r>
               <a:rPr sz="1100" b="0">
@@ -6425,7 +6431,7 @@
                 </a:solidFill>
                 <a:latin typeface="Inter"/>
               </a:rPr>
-              <a:t>read every source, investigate like an analyst, rank the whole book by risk, and show the work — so the human starts from evidence, not a blank page.</a:t>
+              <a:t>Read every file, dig like a good reviewer would, put the whole customer list in order of risk, and show the working — so a person starts with evidence instead of a blank page.</a:t>
             </a:r>
           </a:p>
           <a:p>
@@ -6444,7 +6450,7 @@
                 </a:solidFill>
                 <a:latin typeface="Inter"/>
               </a:rPr>
-              <a:t>A false negative is catastrophic; a false positive is merely expensive — so the system must </a:t>
+              <a:t>Missing a real bad actor is a disaster; a false alarm is just costly. So the system has to </a:t>
             </a:r>
             <a:r>
               <a:rPr sz="1100" b="1">
@@ -6453,7 +6459,7 @@
                 </a:solidFill>
                 <a:latin typeface="Inter"/>
               </a:rPr>
-              <a:t>know when it is unsure and escalate</a:t>
+              <a:t>admit when it is unsure and hand over</a:t>
             </a:r>
             <a:r>
               <a:rPr sz="1100" b="0">
@@ -6462,7 +6468,7 @@
                 </a:solidFill>
                 <a:latin typeface="Inter"/>
               </a:rPr>
-              <a:t>. That is why confidence, not score, decides who sees a case.</a:t>
+              <a:t>, instead of bluffing. That one rule shaped the whole design.</a:t>
             </a:r>
           </a:p>
         </p:txBody>
@@ -6574,7 +6580,7 @@
                 </a:solidFill>
                 <a:latin typeface="Inter"/>
               </a:rPr>
-              <a:t>02 · SOLUTION APPROACH</a:t>
+              <a:t>02 · HOW WE BUILT IT</a:t>
             </a:r>
           </a:p>
         </p:txBody>
@@ -6616,7 +6622,7 @@
                 </a:solidFill>
                 <a:latin typeface="Inter"/>
               </a:rPr>
-              <a:t>Parallel where independent, serial where dependent</a:t>
+              <a:t>A team of AI specialists, then one lead investigator</a:t>
             </a:r>
           </a:p>
         </p:txBody>
@@ -6658,7 +6664,7 @@
                 </a:solidFill>
                 <a:latin typeface="Inter"/>
               </a:rPr>
-              <a:t>Four stages per customer. No deterministic rules engine — the LLM produces the score; code supplies tools, memory and guardrails.</a:t>
+              <a:t>Four steps per customer. There is no scoring formula anywhere in the code — the AI decides the number. The code just hands it the right tools, the right memory, and a set of rules it cannot break.</a:t>
             </a:r>
           </a:p>
         </p:txBody>
@@ -6748,7 +6754,7 @@
                 </a:solidFill>
                 <a:latin typeface="Inter"/>
               </a:rPr>
-              <a:t>1 · INGEST</a:t>
+              <a:t>1 · GATHER THE FILE</a:t>
             </a:r>
           </a:p>
         </p:txBody>
@@ -6790,7 +6796,7 @@
                 </a:solidFill>
                 <a:latin typeface="Inter"/>
               </a:rPr>
-              <a:t>kyc · account · transactions</a:t>
+              <a:t>five separate files in,</a:t>
             </a:r>
           </a:p>
           <a:p>
@@ -6809,7 +6815,7 @@
                 </a:solidFill>
                 <a:latin typeface="Inter"/>
               </a:rPr>
-              <a:t>id_document · rm_notes</a:t>
+              <a:t>one tidy case folder out</a:t>
             </a:r>
           </a:p>
           <a:p>
@@ -6828,7 +6834,7 @@
                 </a:solidFill>
                 <a:latin typeface="Inter"/>
               </a:rPr>
-              <a:t>correspondence</a:t>
+              <a:t/>
             </a:r>
           </a:p>
           <a:p>
@@ -6847,26 +6853,7 @@
                 </a:solidFill>
                 <a:latin typeface="Inter"/>
               </a:rPr>
-              <a:t/>
-            </a:r>
-          </a:p>
-          <a:p>
-            <a:pPr algn="l">
-              <a:lnSpc>
-                <a:spcPct val="115000"/>
-              </a:lnSpc>
-              <a:spcAft>
-                <a:spcPts val="200"/>
-              </a:spcAft>
-            </a:pPr>
-            <a:r>
-              <a:rPr sz="850" b="0">
-                <a:solidFill>
-                  <a:srgbClr val="A1A1AA"/>
-                </a:solidFill>
-                <a:latin typeface="Inter"/>
-              </a:rPr>
-              <a:t>→ one typed Dossier</a:t>
+              <a:t>→ nothing is left unread</a:t>
             </a:r>
           </a:p>
         </p:txBody>
@@ -6956,7 +6943,7 @@
                 </a:solidFill>
                 <a:latin typeface="Inter"/>
               </a:rPr>
-              <a:t>2 · RETRIEVE MEMORY</a:t>
+              <a:t>2 · REMEMBER</a:t>
             </a:r>
           </a:p>
         </p:txBody>
@@ -6998,7 +6985,7 @@
                 </a:solidFill>
                 <a:latin typeface="Inter"/>
               </a:rPr>
-              <a:t>per-customer history</a:t>
+              <a:t>what we knew about them before</a:t>
             </a:r>
           </a:p>
           <a:p>
@@ -7017,7 +7004,7 @@
                 </a:solidFill>
                 <a:latin typeface="Inter"/>
               </a:rPr>
-              <a:t>similar past cases</a:t>
+              <a:t>how we handled similar people</a:t>
             </a:r>
           </a:p>
           <a:p>
@@ -7036,7 +7023,7 @@
                 </a:solidFill>
                 <a:latin typeface="Inter"/>
               </a:rPr>
-              <a:t>lessons learned</a:t>
+              <a:t>lessons from past corrections</a:t>
             </a:r>
           </a:p>
           <a:p>
@@ -7074,7 +7061,7 @@
                 </a:solidFill>
                 <a:latin typeface="Inter"/>
               </a:rPr>
-              <a:t>reference cheat-sheets</a:t>
+              <a:t>the AML rulebook</a:t>
             </a:r>
           </a:p>
         </p:txBody>
@@ -7206,7 +7193,7 @@
                 </a:solidFill>
                 <a:latin typeface="Inter"/>
               </a:rPr>
-              <a:t>3 specialists — PARALLEL</a:t>
+              <a:t>3 specialists work AT ONCE</a:t>
             </a:r>
           </a:p>
           <a:p>
@@ -7225,7 +7212,7 @@
                 </a:solidFill>
                 <a:latin typeface="Inter"/>
               </a:rPr>
-              <a:t>   KYC · transactions · docs</a:t>
+              <a:t>   background · money · papers</a:t>
             </a:r>
           </a:p>
           <a:p>
@@ -7263,7 +7250,7 @@
                 </a:solidFill>
                 <a:latin typeface="Inter"/>
               </a:rPr>
-              <a:t>orchestrator — SERIAL</a:t>
+              <a:t>1 lead works STEP BY STEP</a:t>
             </a:r>
           </a:p>
           <a:p>
@@ -7282,7 +7269,7 @@
                 </a:solidFill>
                 <a:latin typeface="Inter"/>
               </a:rPr>
-              <a:t>   tools → finalize()</a:t>
+              <a:t>   asks, reads, then decides</a:t>
             </a:r>
           </a:p>
         </p:txBody>
@@ -7414,7 +7401,7 @@
                 </a:solidFill>
                 <a:latin typeface="Inter"/>
               </a:rPr>
-              <a:t>conf ≥ 0.60 → auto-dispose</a:t>
+              <a:t>sure enough → decide it</a:t>
             </a:r>
           </a:p>
           <a:p>
@@ -7433,7 +7420,7 @@
                 </a:solidFill>
                 <a:latin typeface="Inter"/>
               </a:rPr>
-              <a:t>conf &lt; 0.60 → human queue</a:t>
+              <a:t>not sure → ask a person</a:t>
             </a:r>
           </a:p>
           <a:p>
@@ -7471,7 +7458,7 @@
                 </a:solidFill>
                 <a:latin typeface="Inter"/>
               </a:rPr>
-              <a:t>correction → memory</a:t>
+              <a:t>their answer → remembered</a:t>
             </a:r>
           </a:p>
         </p:txBody>
@@ -7645,7 +7632,7 @@
                 </a:solidFill>
                 <a:latin typeface="Inter"/>
               </a:rPr>
-              <a:t>WHY TWO DIFFERENT TOPOLOGIES</a:t>
+              <a:t>WHY A TEAM, AND THEN A LEAD</a:t>
             </a:r>
           </a:p>
         </p:txBody>
@@ -7687,7 +7674,7 @@
                 </a:solidFill>
                 <a:latin typeface="Inter"/>
               </a:rPr>
-              <a:t>3 Specialists</a:t>
+              <a:t>The 3 specialists</a:t>
             </a:r>
           </a:p>
         </p:txBody>
@@ -7729,7 +7716,7 @@
                 </a:solidFill>
                 <a:latin typeface="Inter"/>
               </a:rPr>
-              <a:t>1 Orchestrator</a:t>
+              <a:t>The lead investigator</a:t>
             </a:r>
           </a:p>
         </p:txBody>
@@ -7817,7 +7804,7 @@
                 </a:solidFill>
                 <a:latin typeface="Inter"/>
               </a:rPr>
-              <a:t>Execution</a:t>
+              <a:t>How they work</a:t>
             </a:r>
           </a:p>
         </p:txBody>
@@ -7859,7 +7846,7 @@
                 </a:solidFill>
                 <a:latin typeface="Inter"/>
               </a:rPr>
-              <a:t>3 calls in parallel</a:t>
+              <a:t>all three at once</a:t>
             </a:r>
           </a:p>
         </p:txBody>
@@ -7901,7 +7888,7 @@
                 </a:solidFill>
                 <a:latin typeface="Inter"/>
               </a:rPr>
-              <a:t>serial loop, one call at a time</a:t>
+              <a:t>one step at a time</a:t>
             </a:r>
           </a:p>
         </p:txBody>
@@ -7943,7 +7930,7 @@
                 </a:solidFill>
                 <a:latin typeface="Inter"/>
               </a:rPr>
-              <a:t>Sees</a:t>
+              <a:t>What they see</a:t>
             </a:r>
           </a:p>
         </p:txBody>
@@ -7985,7 +7972,7 @@
                 </a:solidFill>
                 <a:latin typeface="Inter"/>
               </a:rPr>
-              <a:t>only its own slice</a:t>
+              <a:t>only their own topic</a:t>
             </a:r>
           </a:p>
         </p:txBody>
@@ -8027,7 +8014,7 @@
                 </a:solidFill>
                 <a:latin typeface="Inter"/>
               </a:rPr>
-              <a:t>all 3 opinions + dossier + tools</a:t>
+              <a:t>all 3 views + the whole file</a:t>
             </a:r>
           </a:p>
         </p:txBody>
@@ -8115,7 +8102,7 @@
                 </a:solidFill>
                 <a:latin typeface="Inter"/>
               </a:rPr>
-              <a:t>Returns</a:t>
+              <a:t>What they give</a:t>
             </a:r>
           </a:p>
         </p:txBody>
@@ -8157,7 +8144,7 @@
                 </a:solidFill>
                 <a:latin typeface="Inter"/>
               </a:rPr>
-              <a:t>SpecialistOpinion</a:t>
+              <a:t>an opinion, not a verdict</a:t>
             </a:r>
           </a:p>
         </p:txBody>
@@ -8199,7 +8186,7 @@
                 </a:solidFill>
                 <a:latin typeface="Inter"/>
               </a:rPr>
-              <a:t>RiskFinding via finalize()</a:t>
+              <a:t>the final call, with reasons</a:t>
             </a:r>
           </a:p>
         </p:txBody>
@@ -8241,7 +8228,7 @@
                 </a:solidFill>
                 <a:latin typeface="Inter"/>
               </a:rPr>
-              <a:t>Why</a:t>
+              <a:t>Why this way</a:t>
             </a:r>
           </a:p>
         </p:txBody>
@@ -8283,7 +8270,7 @@
                 </a:solidFill>
                 <a:latin typeface="Inter"/>
               </a:rPr>
-              <a:t>speed, no cross-talk</a:t>
+              <a:t>fast, and no groupthink</a:t>
             </a:r>
           </a:p>
         </p:txBody>
@@ -8325,7 +8312,7 @@
                 </a:solidFill>
                 <a:latin typeface="Inter"/>
               </a:rPr>
-              <a:t>each result informs the next question</a:t>
+              <a:t>each answer shapes the next question</a:t>
             </a:r>
           </a:p>
         </p:txBody>
@@ -8367,7 +8354,7 @@
                 </a:solidFill>
                 <a:latin typeface="Inter"/>
               </a:rPr>
-              <a:t>LAYERED MEMORY — 5 TIERS, 3 STORES</a:t>
+              <a:t>FIVE KINDS OF MEMORY IT CAN DRAW ON</a:t>
             </a:r>
           </a:p>
         </p:txBody>
@@ -8473,7 +8460,7 @@
         <p:spPr>
           <a:xfrm>
             <a:off x="6565392" y="3447288"/>
-            <a:ext cx="1188720" cy="219456"/>
+            <a:ext cx="1371600" cy="219456"/>
           </a:xfrm>
           <a:prstGeom prst="rect">
             <a:avLst/>
@@ -8501,7 +8488,7 @@
                 </a:solidFill>
                 <a:latin typeface="Inter"/>
               </a:rPr>
-              <a:t>Working</a:t>
+              <a:t>Scratchpad</a:t>
             </a:r>
           </a:p>
         </p:txBody>
@@ -8514,8 +8501,8 @@
         </p:nvSpPr>
         <p:spPr>
           <a:xfrm>
-            <a:off x="7726679" y="3447288"/>
-            <a:ext cx="1783080" cy="219456"/>
+            <a:off x="8092440" y="3447288"/>
+            <a:ext cx="2377440" cy="219456"/>
           </a:xfrm>
           <a:prstGeom prst="rect">
             <a:avLst/>
@@ -8543,7 +8530,7 @@
                 </a:solidFill>
                 <a:latin typeface="Inter"/>
               </a:rPr>
-              <a:t>notes during this run</a:t>
+              <a:t>notes it takes while working</a:t>
             </a:r>
           </a:p>
         </p:txBody>
@@ -8556,8 +8543,8 @@
         </p:nvSpPr>
         <p:spPr>
           <a:xfrm>
-            <a:off x="9528048" y="3447288"/>
-            <a:ext cx="1280160" cy="219456"/>
+            <a:off x="10515600" y="3447288"/>
+            <a:ext cx="1097280" cy="219456"/>
           </a:xfrm>
           <a:prstGeom prst="rect">
             <a:avLst/>
@@ -8581,60 +8568,18 @@
             <a:r>
               <a:rPr sz="800" b="0">
                 <a:solidFill>
-                  <a:srgbClr val="A1A1AA"/>
-                </a:solidFill>
-                <a:latin typeface="Consolas"/>
-              </a:rPr>
-              <a:t>Redis scratchpad</a:t>
-            </a:r>
-          </a:p>
-        </p:txBody>
-      </p:sp>
-      <p:sp>
-        <p:nvSpPr>
-          <p:cNvPr id="44" name="TextBox 43"/>
-          <p:cNvSpPr txBox="1"/>
-          <p:nvPr/>
-        </p:nvSpPr>
-        <p:spPr>
-          <a:xfrm>
-            <a:off x="10844784" y="3447288"/>
-            <a:ext cx="777240" cy="219456"/>
-          </a:xfrm>
-          <a:prstGeom prst="rect">
-            <a:avLst/>
-          </a:prstGeom>
-          <a:noFill/>
-        </p:spPr>
-        <p:txBody>
-          <a:bodyPr wrap="square" lIns="0" rIns="0" tIns="0" bIns="0">
-            <a:spAutoFit/>
-          </a:bodyPr>
-          <a:lstStyle/>
-          <a:p>
-            <a:pPr algn="l">
-              <a:lnSpc>
-                <a:spcPct val="125000"/>
-              </a:lnSpc>
-              <a:spcAft>
-                <a:spcPts val="600"/>
-              </a:spcAft>
-            </a:pPr>
-            <a:r>
-              <a:rPr sz="750" b="0">
-                <a:solidFill>
                   <a:srgbClr val="71717A"/>
                 </a:solidFill>
                 <a:latin typeface="Inter"/>
               </a:rPr>
-              <a:t>evicted on exit</a:t>
-            </a:r>
-          </a:p>
-        </p:txBody>
-      </p:sp>
-      <p:sp>
-        <p:nvSpPr>
-          <p:cNvPr id="45" name="Rounded Rectangle 44"/>
+              <a:t>wiped when done</a:t>
+            </a:r>
+          </a:p>
+        </p:txBody>
+      </p:sp>
+      <p:sp>
+        <p:nvSpPr>
+          <p:cNvPr id="44" name="Rounded Rectangle 43"/>
           <p:cNvSpPr/>
           <p:nvPr/>
         </p:nvSpPr>
@@ -8680,7 +8625,7 @@
       </p:sp>
       <p:sp>
         <p:nvSpPr>
-          <p:cNvPr id="46" name="Rounded Rectangle 45"/>
+          <p:cNvPr id="45" name="Rounded Rectangle 44"/>
           <p:cNvSpPr/>
           <p:nvPr/>
         </p:nvSpPr>
@@ -8726,14 +8671,56 @@
       </p:sp>
       <p:sp>
         <p:nvSpPr>
+          <p:cNvPr id="46" name="TextBox 45"/>
+          <p:cNvSpPr txBox="1"/>
+          <p:nvPr/>
+        </p:nvSpPr>
+        <p:spPr>
+          <a:xfrm>
+            <a:off x="6565392" y="3785616"/>
+            <a:ext cx="1371600" cy="219456"/>
+          </a:xfrm>
+          <a:prstGeom prst="rect">
+            <a:avLst/>
+          </a:prstGeom>
+          <a:noFill/>
+        </p:spPr>
+        <p:txBody>
+          <a:bodyPr wrap="square" lIns="0" rIns="0" tIns="0" bIns="0">
+            <a:spAutoFit/>
+          </a:bodyPr>
+          <a:lstStyle/>
+          <a:p>
+            <a:pPr algn="l">
+              <a:lnSpc>
+                <a:spcPct val="125000"/>
+              </a:lnSpc>
+              <a:spcAft>
+                <a:spcPts val="600"/>
+              </a:spcAft>
+            </a:pPr>
+            <a:r>
+              <a:rPr sz="900" b="1">
+                <a:solidFill>
+                  <a:srgbClr val="EDEDF0"/>
+                </a:solidFill>
+                <a:latin typeface="Inter"/>
+              </a:rPr>
+              <a:t>This person</a:t>
+            </a:r>
+          </a:p>
+        </p:txBody>
+      </p:sp>
+      <p:sp>
+        <p:nvSpPr>
           <p:cNvPr id="47" name="TextBox 46"/>
           <p:cNvSpPr txBox="1"/>
           <p:nvPr/>
         </p:nvSpPr>
         <p:spPr>
           <a:xfrm>
-            <a:off x="6565392" y="3785616"/>
-            <a:ext cx="1188720" cy="219456"/>
+            <a:off x="8092440" y="3785616"/>
+            <a:ext cx="2377440" cy="219456"/>
           </a:xfrm>
           <a:prstGeom prst="rect">
             <a:avLst/>
@@ -8755,13 +8742,13 @@
               </a:spcAft>
             </a:pPr>
             <a:r>
-              <a:rPr sz="900" b="1">
-                <a:solidFill>
-                  <a:srgbClr val="EDEDF0"/>
-                </a:solidFill>
-                <a:latin typeface="Inter"/>
-              </a:rPr>
-              <a:t>Per-customer</a:t>
+              <a:rPr sz="850" b="0">
+                <a:solidFill>
+                  <a:srgbClr val="A1A1AA"/>
+                </a:solidFill>
+                <a:latin typeface="Inter"/>
+              </a:rPr>
+              <a:t>how we judged them before</a:t>
             </a:r>
           </a:p>
         </p:txBody>
@@ -8774,8 +8761,8 @@
         </p:nvSpPr>
         <p:spPr>
           <a:xfrm>
-            <a:off x="7726679" y="3785616"/>
-            <a:ext cx="1783080" cy="219456"/>
+            <a:off x="10515600" y="3785616"/>
+            <a:ext cx="1097280" cy="219456"/>
           </a:xfrm>
           <a:prstGeom prst="rect">
             <a:avLst/>
@@ -8797,104 +8784,20 @@
               </a:spcAft>
             </a:pPr>
             <a:r>
-              <a:rPr sz="850" b="0">
-                <a:solidFill>
-                  <a:srgbClr val="A1A1AA"/>
-                </a:solidFill>
-                <a:latin typeface="Inter"/>
-              </a:rPr>
-              <a:t>this customer's history</a:t>
-            </a:r>
-          </a:p>
-        </p:txBody>
-      </p:sp>
-      <p:sp>
-        <p:nvSpPr>
-          <p:cNvPr id="49" name="TextBox 48"/>
-          <p:cNvSpPr txBox="1"/>
-          <p:nvPr/>
-        </p:nvSpPr>
-        <p:spPr>
-          <a:xfrm>
-            <a:off x="9528048" y="3785616"/>
-            <a:ext cx="1280160" cy="219456"/>
-          </a:xfrm>
-          <a:prstGeom prst="rect">
-            <a:avLst/>
-          </a:prstGeom>
-          <a:noFill/>
-        </p:spPr>
-        <p:txBody>
-          <a:bodyPr wrap="square" lIns="0" rIns="0" tIns="0" bIns="0">
-            <a:spAutoFit/>
-          </a:bodyPr>
-          <a:lstStyle/>
-          <a:p>
-            <a:pPr algn="l">
-              <a:lnSpc>
-                <a:spcPct val="125000"/>
-              </a:lnSpc>
-              <a:spcAft>
-                <a:spcPts val="600"/>
-              </a:spcAft>
-            </a:pPr>
-            <a:r>
               <a:rPr sz="800" b="0">
                 <a:solidFill>
-                  <a:srgbClr val="A1A1AA"/>
-                </a:solidFill>
-                <a:latin typeface="Consolas"/>
-              </a:rPr>
-              <a:t>SQLite assessments</a:t>
-            </a:r>
-          </a:p>
-        </p:txBody>
-      </p:sp>
-      <p:sp>
-        <p:nvSpPr>
-          <p:cNvPr id="50" name="TextBox 49"/>
-          <p:cNvSpPr txBox="1"/>
-          <p:nvPr/>
-        </p:nvSpPr>
-        <p:spPr>
-          <a:xfrm>
-            <a:off x="10844784" y="3785616"/>
-            <a:ext cx="777240" cy="219456"/>
-          </a:xfrm>
-          <a:prstGeom prst="rect">
-            <a:avLst/>
-          </a:prstGeom>
-          <a:noFill/>
-        </p:spPr>
-        <p:txBody>
-          <a:bodyPr wrap="square" lIns="0" rIns="0" tIns="0" bIns="0">
-            <a:spAutoFit/>
-          </a:bodyPr>
-          <a:lstStyle/>
-          <a:p>
-            <a:pPr algn="l">
-              <a:lnSpc>
-                <a:spcPct val="125000"/>
-              </a:lnSpc>
-              <a:spcAft>
-                <a:spcPts val="600"/>
-              </a:spcAft>
-            </a:pPr>
-            <a:r>
-              <a:rPr sz="750" b="0">
-                <a:solidFill>
                   <a:srgbClr val="71717A"/>
                 </a:solidFill>
                 <a:latin typeface="Inter"/>
               </a:rPr>
-              <a:t>permanent</a:t>
-            </a:r>
-          </a:p>
-        </p:txBody>
-      </p:sp>
-      <p:sp>
-        <p:nvSpPr>
-          <p:cNvPr id="51" name="Rounded Rectangle 50"/>
+              <a:t>kept forever</a:t>
+            </a:r>
+          </a:p>
+        </p:txBody>
+      </p:sp>
+      <p:sp>
+        <p:nvSpPr>
+          <p:cNvPr id="49" name="Rounded Rectangle 48"/>
           <p:cNvSpPr/>
           <p:nvPr/>
         </p:nvSpPr>
@@ -8940,7 +8843,7 @@
       </p:sp>
       <p:sp>
         <p:nvSpPr>
-          <p:cNvPr id="52" name="Rounded Rectangle 51"/>
+          <p:cNvPr id="50" name="Rounded Rectangle 49"/>
           <p:cNvSpPr/>
           <p:nvPr/>
         </p:nvSpPr>
@@ -8986,14 +8889,98 @@
       </p:sp>
       <p:sp>
         <p:nvSpPr>
+          <p:cNvPr id="51" name="TextBox 50"/>
+          <p:cNvSpPr txBox="1"/>
+          <p:nvPr/>
+        </p:nvSpPr>
+        <p:spPr>
+          <a:xfrm>
+            <a:off x="6565392" y="4123944"/>
+            <a:ext cx="1371600" cy="219456"/>
+          </a:xfrm>
+          <a:prstGeom prst="rect">
+            <a:avLst/>
+          </a:prstGeom>
+          <a:noFill/>
+        </p:spPr>
+        <p:txBody>
+          <a:bodyPr wrap="square" lIns="0" rIns="0" tIns="0" bIns="0">
+            <a:spAutoFit/>
+          </a:bodyPr>
+          <a:lstStyle/>
+          <a:p>
+            <a:pPr algn="l">
+              <a:lnSpc>
+                <a:spcPct val="125000"/>
+              </a:lnSpc>
+              <a:spcAft>
+                <a:spcPts val="600"/>
+              </a:spcAft>
+            </a:pPr>
+            <a:r>
+              <a:rPr sz="900" b="1">
+                <a:solidFill>
+                  <a:srgbClr val="EDEDF0"/>
+                </a:solidFill>
+                <a:latin typeface="Inter"/>
+              </a:rPr>
+              <a:t>Past cases</a:t>
+            </a:r>
+          </a:p>
+        </p:txBody>
+      </p:sp>
+      <p:sp>
+        <p:nvSpPr>
+          <p:cNvPr id="52" name="TextBox 51"/>
+          <p:cNvSpPr txBox="1"/>
+          <p:nvPr/>
+        </p:nvSpPr>
+        <p:spPr>
+          <a:xfrm>
+            <a:off x="8092440" y="4123944"/>
+            <a:ext cx="2377440" cy="219456"/>
+          </a:xfrm>
+          <a:prstGeom prst="rect">
+            <a:avLst/>
+          </a:prstGeom>
+          <a:noFill/>
+        </p:spPr>
+        <p:txBody>
+          <a:bodyPr wrap="square" lIns="0" rIns="0" tIns="0" bIns="0">
+            <a:spAutoFit/>
+          </a:bodyPr>
+          <a:lstStyle/>
+          <a:p>
+            <a:pPr algn="l">
+              <a:lnSpc>
+                <a:spcPct val="125000"/>
+              </a:lnSpc>
+              <a:spcAft>
+                <a:spcPts val="600"/>
+              </a:spcAft>
+            </a:pPr>
+            <a:r>
+              <a:rPr sz="850" b="0">
+                <a:solidFill>
+                  <a:srgbClr val="A1A1AA"/>
+                </a:solidFill>
+                <a:latin typeface="Inter"/>
+              </a:rPr>
+              <a:t>people who looked like this</a:t>
+            </a:r>
+          </a:p>
+        </p:txBody>
+      </p:sp>
+      <p:sp>
+        <p:nvSpPr>
           <p:cNvPr id="53" name="TextBox 52"/>
           <p:cNvSpPr txBox="1"/>
           <p:nvPr/>
         </p:nvSpPr>
         <p:spPr>
           <a:xfrm>
-            <a:off x="6565392" y="4123944"/>
-            <a:ext cx="1188720" cy="219456"/>
+            <a:off x="10515600" y="4123944"/>
+            <a:ext cx="1097280" cy="219456"/>
           </a:xfrm>
           <a:prstGeom prst="rect">
             <a:avLst/>
@@ -9015,146 +9002,20 @@
               </a:spcAft>
             </a:pPr>
             <a:r>
-              <a:rPr sz="900" b="1">
-                <a:solidFill>
-                  <a:srgbClr val="EDEDF0"/>
-                </a:solidFill>
-                <a:latin typeface="Inter"/>
-              </a:rPr>
-              <a:t>Episodic</a:t>
-            </a:r>
-          </a:p>
-        </p:txBody>
-      </p:sp>
-      <p:sp>
-        <p:nvSpPr>
-          <p:cNvPr id="54" name="TextBox 53"/>
-          <p:cNvSpPr txBox="1"/>
-          <p:nvPr/>
-        </p:nvSpPr>
-        <p:spPr>
-          <a:xfrm>
-            <a:off x="7726679" y="4123944"/>
-            <a:ext cx="1783080" cy="219456"/>
-          </a:xfrm>
-          <a:prstGeom prst="rect">
-            <a:avLst/>
-          </a:prstGeom>
-          <a:noFill/>
-        </p:spPr>
-        <p:txBody>
-          <a:bodyPr wrap="square" lIns="0" rIns="0" tIns="0" bIns="0">
-            <a:spAutoFit/>
-          </a:bodyPr>
-          <a:lstStyle/>
-          <a:p>
-            <a:pPr algn="l">
-              <a:lnSpc>
-                <a:spcPct val="125000"/>
-              </a:lnSpc>
-              <a:spcAft>
-                <a:spcPts val="600"/>
-              </a:spcAft>
-            </a:pPr>
-            <a:r>
-              <a:rPr sz="850" b="0">
-                <a:solidFill>
-                  <a:srgbClr val="A1A1AA"/>
-                </a:solidFill>
-                <a:latin typeface="Inter"/>
-              </a:rPr>
-              <a:t>similar cases + corrections</a:t>
-            </a:r>
-          </a:p>
-        </p:txBody>
-      </p:sp>
-      <p:sp>
-        <p:nvSpPr>
-          <p:cNvPr id="55" name="TextBox 54"/>
-          <p:cNvSpPr txBox="1"/>
-          <p:nvPr/>
-        </p:nvSpPr>
-        <p:spPr>
-          <a:xfrm>
-            <a:off x="9528048" y="4123944"/>
-            <a:ext cx="1280160" cy="219456"/>
-          </a:xfrm>
-          <a:prstGeom prst="rect">
-            <a:avLst/>
-          </a:prstGeom>
-          <a:noFill/>
-        </p:spPr>
-        <p:txBody>
-          <a:bodyPr wrap="square" lIns="0" rIns="0" tIns="0" bIns="0">
-            <a:spAutoFit/>
-          </a:bodyPr>
-          <a:lstStyle/>
-          <a:p>
-            <a:pPr algn="l">
-              <a:lnSpc>
-                <a:spcPct val="125000"/>
-              </a:lnSpc>
-              <a:spcAft>
-                <a:spcPts val="600"/>
-              </a:spcAft>
-            </a:pPr>
-            <a:r>
               <a:rPr sz="800" b="0">
                 <a:solidFill>
-                  <a:srgbClr val="A1A1AA"/>
-                </a:solidFill>
-                <a:latin typeface="Consolas"/>
-              </a:rPr>
-              <a:t>case bank</a:t>
-            </a:r>
-          </a:p>
-        </p:txBody>
-      </p:sp>
-      <p:sp>
-        <p:nvSpPr>
-          <p:cNvPr id="56" name="TextBox 55"/>
-          <p:cNvSpPr txBox="1"/>
-          <p:nvPr/>
-        </p:nvSpPr>
-        <p:spPr>
-          <a:xfrm>
-            <a:off x="10844784" y="4123944"/>
-            <a:ext cx="777240" cy="219456"/>
-          </a:xfrm>
-          <a:prstGeom prst="rect">
-            <a:avLst/>
-          </a:prstGeom>
-          <a:noFill/>
-        </p:spPr>
-        <p:txBody>
-          <a:bodyPr wrap="square" lIns="0" rIns="0" tIns="0" bIns="0">
-            <a:spAutoFit/>
-          </a:bodyPr>
-          <a:lstStyle/>
-          <a:p>
-            <a:pPr algn="l">
-              <a:lnSpc>
-                <a:spcPct val="125000"/>
-              </a:lnSpc>
-              <a:spcAft>
-                <a:spcPts val="600"/>
-              </a:spcAft>
-            </a:pPr>
-            <a:r>
-              <a:rPr sz="750" b="0">
-                <a:solidFill>
                   <a:srgbClr val="71717A"/>
                 </a:solidFill>
                 <a:latin typeface="Inter"/>
               </a:rPr>
-              <a:t>permanent</a:t>
-            </a:r>
-          </a:p>
-        </p:txBody>
-      </p:sp>
-      <p:sp>
-        <p:nvSpPr>
-          <p:cNvPr id="57" name="Rounded Rectangle 56"/>
+              <a:t>kept forever</a:t>
+            </a:r>
+          </a:p>
+        </p:txBody>
+      </p:sp>
+      <p:sp>
+        <p:nvSpPr>
+          <p:cNvPr id="54" name="Rounded Rectangle 53"/>
           <p:cNvSpPr/>
           <p:nvPr/>
         </p:nvSpPr>
@@ -9200,7 +9061,7 @@
       </p:sp>
       <p:sp>
         <p:nvSpPr>
-          <p:cNvPr id="58" name="Rounded Rectangle 57"/>
+          <p:cNvPr id="55" name="Rounded Rectangle 54"/>
           <p:cNvSpPr/>
           <p:nvPr/>
         </p:nvSpPr>
@@ -9246,14 +9107,14 @@
       </p:sp>
       <p:sp>
         <p:nvSpPr>
-          <p:cNvPr id="59" name="TextBox 58"/>
+          <p:cNvPr id="56" name="TextBox 55"/>
           <p:cNvSpPr txBox="1"/>
           <p:nvPr/>
         </p:nvSpPr>
         <p:spPr>
           <a:xfrm>
             <a:off x="6565392" y="4462271"/>
-            <a:ext cx="1188720" cy="219456"/>
+            <a:ext cx="1371600" cy="219456"/>
           </a:xfrm>
           <a:prstGeom prst="rect">
             <a:avLst/>
@@ -9281,21 +9142,21 @@
                 </a:solidFill>
                 <a:latin typeface="Inter"/>
               </a:rPr>
-              <a:t>Semantic</a:t>
-            </a:r>
-          </a:p>
-        </p:txBody>
-      </p:sp>
-      <p:sp>
-        <p:nvSpPr>
-          <p:cNvPr id="60" name="TextBox 59"/>
-          <p:cNvSpPr txBox="1"/>
-          <p:nvPr/>
-        </p:nvSpPr>
-        <p:spPr>
-          <a:xfrm>
-            <a:off x="7726679" y="4462271"/>
-            <a:ext cx="1783080" cy="219456"/>
+              <a:t>The rulebook</a:t>
+            </a:r>
+          </a:p>
+        </p:txBody>
+      </p:sp>
+      <p:sp>
+        <p:nvSpPr>
+          <p:cNvPr id="57" name="TextBox 56"/>
+          <p:cNvSpPr txBox="1"/>
+          <p:nvPr/>
+        </p:nvSpPr>
+        <p:spPr>
+          <a:xfrm>
+            <a:off x="8092440" y="4462271"/>
+            <a:ext cx="2377440" cy="219456"/>
           </a:xfrm>
           <a:prstGeom prst="rect">
             <a:avLst/>
@@ -9323,21 +9184,21 @@
                 </a:solidFill>
                 <a:latin typeface="Inter"/>
               </a:rPr>
-              <a:t>typology defs, risk lists</a:t>
-            </a:r>
-          </a:p>
-        </p:txBody>
-      </p:sp>
-      <p:sp>
-        <p:nvSpPr>
-          <p:cNvPr id="61" name="TextBox 60"/>
-          <p:cNvSpPr txBox="1"/>
-          <p:nvPr/>
-        </p:nvSpPr>
-        <p:spPr>
-          <a:xfrm>
-            <a:off x="9528048" y="4462271"/>
-            <a:ext cx="1280160" cy="219456"/>
+              <a:t>what each crime pattern means</a:t>
+            </a:r>
+          </a:p>
+        </p:txBody>
+      </p:sp>
+      <p:sp>
+        <p:nvSpPr>
+          <p:cNvPr id="58" name="TextBox 57"/>
+          <p:cNvSpPr txBox="1"/>
+          <p:nvPr/>
+        </p:nvSpPr>
+        <p:spPr>
+          <a:xfrm>
+            <a:off x="10515600" y="4462271"/>
+            <a:ext cx="1097280" cy="219456"/>
           </a:xfrm>
           <a:prstGeom prst="rect">
             <a:avLst/>
@@ -9361,60 +9222,18 @@
             <a:r>
               <a:rPr sz="800" b="0">
                 <a:solidFill>
-                  <a:srgbClr val="A1A1AA"/>
-                </a:solidFill>
-                <a:latin typeface="Consolas"/>
-              </a:rPr>
-              <a:t>static files</a:t>
-            </a:r>
-          </a:p>
-        </p:txBody>
-      </p:sp>
-      <p:sp>
-        <p:nvSpPr>
-          <p:cNvPr id="62" name="TextBox 61"/>
-          <p:cNvSpPr txBox="1"/>
-          <p:nvPr/>
-        </p:nvSpPr>
-        <p:spPr>
-          <a:xfrm>
-            <a:off x="10844784" y="4462271"/>
-            <a:ext cx="777240" cy="219456"/>
-          </a:xfrm>
-          <a:prstGeom prst="rect">
-            <a:avLst/>
-          </a:prstGeom>
-          <a:noFill/>
-        </p:spPr>
-        <p:txBody>
-          <a:bodyPr wrap="square" lIns="0" rIns="0" tIns="0" bIns="0">
-            <a:spAutoFit/>
-          </a:bodyPr>
-          <a:lstStyle/>
-          <a:p>
-            <a:pPr algn="l">
-              <a:lnSpc>
-                <a:spcPct val="125000"/>
-              </a:lnSpc>
-              <a:spcAft>
-                <a:spcPts val="600"/>
-              </a:spcAft>
-            </a:pPr>
-            <a:r>
-              <a:rPr sz="750" b="0">
-                <a:solidFill>
                   <a:srgbClr val="71717A"/>
                 </a:solidFill>
                 <a:latin typeface="Inter"/>
               </a:rPr>
-              <a:t>static</a:t>
-            </a:r>
-          </a:p>
-        </p:txBody>
-      </p:sp>
-      <p:sp>
-        <p:nvSpPr>
-          <p:cNvPr id="63" name="Rounded Rectangle 62"/>
+              <a:t>fixed reference</a:t>
+            </a:r>
+          </a:p>
+        </p:txBody>
+      </p:sp>
+      <p:sp>
+        <p:nvSpPr>
+          <p:cNvPr id="59" name="Rounded Rectangle 58"/>
           <p:cNvSpPr/>
           <p:nvPr/>
         </p:nvSpPr>
@@ -9460,7 +9279,7 @@
       </p:sp>
       <p:sp>
         <p:nvSpPr>
-          <p:cNvPr id="64" name="Rounded Rectangle 63"/>
+          <p:cNvPr id="60" name="Rounded Rectangle 59"/>
           <p:cNvSpPr/>
           <p:nvPr/>
         </p:nvSpPr>
@@ -9506,14 +9325,14 @@
       </p:sp>
       <p:sp>
         <p:nvSpPr>
-          <p:cNvPr id="65" name="TextBox 64"/>
+          <p:cNvPr id="61" name="TextBox 60"/>
           <p:cNvSpPr txBox="1"/>
           <p:nvPr/>
         </p:nvSpPr>
         <p:spPr>
           <a:xfrm>
             <a:off x="6565392" y="4800600"/>
-            <a:ext cx="1188720" cy="219456"/>
+            <a:ext cx="1371600" cy="219456"/>
           </a:xfrm>
           <a:prstGeom prst="rect">
             <a:avLst/>
@@ -9541,21 +9360,21 @@
                 </a:solidFill>
                 <a:latin typeface="Inter"/>
               </a:rPr>
-              <a:t>Procedural</a:t>
-            </a:r>
-          </a:p>
-        </p:txBody>
-      </p:sp>
-      <p:sp>
-        <p:nvSpPr>
-          <p:cNvPr id="66" name="TextBox 65"/>
-          <p:cNvSpPr txBox="1"/>
-          <p:nvPr/>
-        </p:nvSpPr>
-        <p:spPr>
-          <a:xfrm>
-            <a:off x="7726679" y="4800600"/>
-            <a:ext cx="1783080" cy="219456"/>
+              <a:t>Lessons</a:t>
+            </a:r>
+          </a:p>
+        </p:txBody>
+      </p:sp>
+      <p:sp>
+        <p:nvSpPr>
+          <p:cNvPr id="62" name="TextBox 61"/>
+          <p:cNvSpPr txBox="1"/>
+          <p:nvPr/>
+        </p:nvSpPr>
+        <p:spPr>
+          <a:xfrm>
+            <a:off x="8092440" y="4800600"/>
+            <a:ext cx="2377440" cy="219456"/>
           </a:xfrm>
           <a:prstGeom prst="rect">
             <a:avLst/>
@@ -9583,21 +9402,21 @@
                 </a:solidFill>
                 <a:latin typeface="Inter"/>
               </a:rPr>
-              <a:t>lessons from corrections</a:t>
-            </a:r>
-          </a:p>
-        </p:txBody>
-      </p:sp>
-      <p:sp>
-        <p:nvSpPr>
-          <p:cNvPr id="67" name="TextBox 66"/>
-          <p:cNvSpPr txBox="1"/>
-          <p:nvPr/>
-        </p:nvSpPr>
-        <p:spPr>
-          <a:xfrm>
-            <a:off x="9528048" y="4800600"/>
-            <a:ext cx="1280160" cy="219456"/>
+              <a:t>where we got it wrong before</a:t>
+            </a:r>
+          </a:p>
+        </p:txBody>
+      </p:sp>
+      <p:sp>
+        <p:nvSpPr>
+          <p:cNvPr id="63" name="TextBox 62"/>
+          <p:cNvSpPr txBox="1"/>
+          <p:nvPr/>
+        </p:nvSpPr>
+        <p:spPr>
+          <a:xfrm>
+            <a:off x="10515600" y="4800600"/>
+            <a:ext cx="1097280" cy="219456"/>
           </a:xfrm>
           <a:prstGeom prst="rect">
             <a:avLst/>
@@ -9621,60 +9440,18 @@
             <a:r>
               <a:rPr sz="800" b="0">
                 <a:solidFill>
-                  <a:srgbClr val="A1A1AA"/>
-                </a:solidFill>
-                <a:latin typeface="Consolas"/>
-              </a:rPr>
-              <a:t>lessons table</a:t>
-            </a:r>
-          </a:p>
-        </p:txBody>
-      </p:sp>
-      <p:sp>
-        <p:nvSpPr>
-          <p:cNvPr id="68" name="TextBox 67"/>
-          <p:cNvSpPr txBox="1"/>
-          <p:nvPr/>
-        </p:nvSpPr>
-        <p:spPr>
-          <a:xfrm>
-            <a:off x="10844784" y="4800600"/>
-            <a:ext cx="777240" cy="219456"/>
-          </a:xfrm>
-          <a:prstGeom prst="rect">
-            <a:avLst/>
-          </a:prstGeom>
-          <a:noFill/>
-        </p:spPr>
-        <p:txBody>
-          <a:bodyPr wrap="square" lIns="0" rIns="0" tIns="0" bIns="0">
-            <a:spAutoFit/>
-          </a:bodyPr>
-          <a:lstStyle/>
-          <a:p>
-            <a:pPr algn="l">
-              <a:lnSpc>
-                <a:spcPct val="125000"/>
-              </a:lnSpc>
-              <a:spcAft>
-                <a:spcPts val="600"/>
-              </a:spcAft>
-            </a:pPr>
-            <a:r>
-              <a:rPr sz="750" b="0">
-                <a:solidFill>
                   <a:srgbClr val="71717A"/>
                 </a:solidFill>
                 <a:latin typeface="Inter"/>
               </a:rPr>
-              <a:t>grows with use</a:t>
-            </a:r>
-          </a:p>
-        </p:txBody>
-      </p:sp>
-      <p:sp>
-        <p:nvSpPr>
-          <p:cNvPr id="69" name="Rounded Rectangle 68"/>
+              <a:t>grows as people fix</a:t>
+            </a:r>
+          </a:p>
+        </p:txBody>
+      </p:sp>
+      <p:sp>
+        <p:nvSpPr>
+          <p:cNvPr id="64" name="Rounded Rectangle 63"/>
           <p:cNvSpPr/>
           <p:nvPr/>
         </p:nvSpPr>
@@ -9722,7 +9499,7 @@
       </p:sp>
       <p:sp>
         <p:nvSpPr>
-          <p:cNvPr id="70" name="TextBox 69"/>
+          <p:cNvPr id="65" name="TextBox 64"/>
           <p:cNvSpPr txBox="1"/>
           <p:nvPr/>
         </p:nvSpPr>
@@ -9757,14 +9534,14 @@
                 </a:solidFill>
                 <a:latin typeface="Inter"/>
               </a:rPr>
-              <a:t>THE KEY DESIGN DECISION</a:t>
-            </a:r>
-          </a:p>
-        </p:txBody>
-      </p:sp>
-      <p:sp>
-        <p:nvSpPr>
-          <p:cNvPr id="71" name="TextBox 70"/>
+              <a:t>THE DECISION WE ARGUED ABOUT MOST</a:t>
+            </a:r>
+          </a:p>
+        </p:txBody>
+      </p:sp>
+      <p:sp>
+        <p:nvSpPr>
+          <p:cNvPr id="66" name="TextBox 65"/>
           <p:cNvSpPr txBox="1"/>
           <p:nvPr/>
         </p:nvSpPr>
@@ -9799,7 +9576,7 @@
                 </a:solidFill>
                 <a:latin typeface="Inter"/>
               </a:rPr>
-              <a:t>The orchestrator is </a:t>
+              <a:t>The lead works </a:t>
             </a:r>
             <a:r>
               <a:rPr sz="950" b="1">
@@ -9808,7 +9585,7 @@
                 </a:solidFill>
                 <a:latin typeface="Inter"/>
               </a:rPr>
-              <a:t>serial</a:t>
+              <a:t>one step at a time</a:t>
             </a:r>
             <a:r>
               <a:rPr sz="950" b="0">
@@ -9817,7 +9594,7 @@
                 </a:solidFill>
                 <a:latin typeface="Inter"/>
               </a:rPr>
-              <a:t> because investigation is inherently sequential — you cannot know which document to open until you have seen the transactions. The specialists are </a:t>
+              <a:t> because real investigation is like that — you cannot know which document to open until you have seen the money. The three specialists work </a:t>
             </a:r>
             <a:r>
               <a:rPr sz="950" b="1">
@@ -9826,7 +9603,7 @@
                 </a:solidFill>
                 <a:latin typeface="Inter"/>
               </a:rPr>
-              <a:t>parallel</a:t>
+              <a:t>all at once</a:t>
             </a:r>
             <a:r>
               <a:rPr sz="950" b="0">
@@ -9835,14 +9612,14 @@
                 </a:solidFill>
                 <a:latin typeface="Inter"/>
               </a:rPr>
-              <a:t> because their domains are independent.</a:t>
-            </a:r>
-          </a:p>
-        </p:txBody>
-      </p:sp>
-      <p:sp>
-        <p:nvSpPr>
-          <p:cNvPr id="72" name="Rounded Rectangle 71"/>
+              <a:t> because their topics never overlap.</a:t>
+            </a:r>
+          </a:p>
+        </p:txBody>
+      </p:sp>
+      <p:sp>
+        <p:nvSpPr>
+          <p:cNvPr id="67" name="Rounded Rectangle 66"/>
           <p:cNvSpPr/>
           <p:nvPr/>
         </p:nvSpPr>
@@ -9890,7 +9667,7 @@
       </p:sp>
       <p:sp>
         <p:nvSpPr>
-          <p:cNvPr id="73" name="TextBox 72"/>
+          <p:cNvPr id="68" name="TextBox 67"/>
           <p:cNvSpPr txBox="1"/>
           <p:nvPr/>
         </p:nvSpPr>
@@ -9925,14 +9702,14 @@
                 </a:solidFill>
                 <a:latin typeface="Inter"/>
               </a:rPr>
-              <a:t>WHY MEMORY IS RETRIEVED FIRST</a:t>
-            </a:r>
-          </a:p>
-        </p:txBody>
-      </p:sp>
-      <p:sp>
-        <p:nvSpPr>
-          <p:cNvPr id="74" name="TextBox 73"/>
+              <a:t>WHY IT REMEMBERS BEFORE IT THINKS</a:t>
+            </a:r>
+          </a:p>
+        </p:txBody>
+      </p:sp>
+      <p:sp>
+        <p:nvSpPr>
+          <p:cNvPr id="69" name="TextBox 68"/>
           <p:cNvSpPr txBox="1"/>
           <p:nvPr/>
         </p:nvSpPr>
@@ -9985,7 +9762,7 @@
                 </a:solidFill>
                 <a:latin typeface="Inter"/>
               </a:rPr>
-              <a:t> the specialists run, so every LLM call in the pipeline sees the same context — past assessments, verified precedents, and lessons from corrections. That is what makes this a system rather than a prompt.</a:t>
+              <a:t> anyone starts thinking, so every part of the pipeline works from the same background — past judgements, similar people, and lessons a human taught it. That is the difference between a system and a clever prompt.</a:t>
             </a:r>
           </a:p>
         </p:txBody>
@@ -10097,7 +9874,7 @@
                 </a:solidFill>
                 <a:latin typeface="Inter"/>
               </a:rPr>
-              <a:t>03 · KEY HIGHLIGHTS</a:t>
+              <a:t>03 · WHAT IT ACTUALLY DOES</a:t>
             </a:r>
           </a:p>
         </p:txBody>
@@ -10139,7 +9916,7 @@
                 </a:solidFill>
                 <a:latin typeface="Inter"/>
               </a:rPr>
-              <a:t>It investigates, cites its evidence, and shows the work</a:t>
+              <a:t>It digs, it points at the evidence, it shows the working</a:t>
             </a:r>
           </a:p>
         </p:txBody>
@@ -10181,7 +9958,7 @@
                 </a:solidFill>
                 <a:latin typeface="Inter"/>
               </a:rPr>
-              <a:t>A real trace from CUST_018 — an Iranian arms dealer. Every step is recorded; the trace is the audit record.</a:t>
+              <a:t>A real investigation of CUST_018 — a customer whose money did not match his story. Every step below was recorded automatically. That record is the receipt.</a:t>
             </a:r>
           </a:p>
         </p:txBody>
@@ -10223,7 +10000,7 @@
                 </a:solidFill>
                 <a:latin typeface="Inter"/>
               </a:rPr>
-              <a:t>THE LOOP — ACTUAL TRACE, 12 STEPS</a:t>
+              <a:t>WHAT IT DID, IN ITS OWN ORDER — 12 STEPS</a:t>
             </a:r>
           </a:p>
         </p:txBody>
@@ -10395,7 +10172,7 @@
                 </a:solidFill>
                 <a:latin typeface="Inter"/>
               </a:rPr>
-              <a:t>id_document.txt — Iranian passport, valid</a:t>
+              <a:t>opened the ID scan — passport checks out</a:t>
             </a:r>
           </a:p>
         </p:txBody>
@@ -10567,7 +10344,7 @@
                 </a:solidFill>
                 <a:latin typeface="Inter"/>
               </a:rPr>
-              <a:t>rm_notes.txt — RM flags poor source of funds</a:t>
+              <a:t>read the banker's notes — “can't explain his income”</a:t>
             </a:r>
           </a:p>
         </p:txBody>
@@ -10739,7 +10516,7 @@
                 </a:solidFill>
                 <a:latin typeface="Inter"/>
               </a:rPr>
-              <a:t>31 transactions, £62,174 in credits</a:t>
+              <a:t>pulled all 31 payments, £62,174 coming in</a:t>
             </a:r>
           </a:p>
         </p:txBody>
@@ -10911,7 +10688,7 @@
                 </a:solidFill>
                 <a:latin typeface="Inter"/>
               </a:rPr>
-              <a:t>filtered 6 ways: cash, counterparty, window</a:t>
+              <a:t>sliced them six ways — cash, who, when</a:t>
             </a:r>
           </a:p>
         </p:txBody>
@@ -11083,7 +10860,7 @@
                 </a:solidFill>
                 <a:latin typeface="Inter"/>
               </a:rPr>
-              <a:t>STRUCTURING candidate, strength 1.0, S00–S03</a:t>
+              <a:t>spotted a possible pattern in rows S00–S03</a:t>
             </a:r>
           </a:p>
         </p:txBody>
@@ -11255,7 +11032,7 @@
                 </a:solidFill>
                 <a:latin typeface="Inter"/>
               </a:rPr>
-              <a:t>“4 sub-threshold deposits in 6 days”</a:t>
+              <a:t>wrote itself: “4 deposits just under the limit, 6 days”</a:t>
             </a:r>
           </a:p>
         </p:txBody>
@@ -11429,7 +11206,7 @@
                 </a:solidFill>
                 <a:latin typeface="Inter"/>
               </a:rPr>
-              <a:t>score 83 · HIGH · ESCALATE · conf 0.85</a:t>
+              <a:t>decided: 83 · HIGH RISK · send to a senior · 85% sure</a:t>
             </a:r>
           </a:p>
         </p:txBody>
@@ -11471,7 +11248,7 @@
                 </a:solidFill>
                 <a:latin typeface="Inter"/>
               </a:rPr>
-              <a:t>OUTPUT — A DECISION THAT CARRIES ITS EVIDENCE</a:t>
+              <a:t>THE ANSWER COMES WITH ITS RECEIPTS ATTACHED</a:t>
             </a:r>
           </a:p>
         </p:txBody>
@@ -11579,7 +11356,7 @@
                 </a:solidFill>
                 <a:latin typeface="Inter"/>
               </a:rPr>
-              <a:t>    HIGH · ESCALATE</a:t>
+              <a:t>    HIGH RISK · SEND TO A SENIOR</a:t>
             </a:r>
             <a:r>
               <a:rPr sz="1000" b="0">
@@ -11588,7 +11365,7 @@
                 </a:solidFill>
                 <a:latin typeface="Inter"/>
               </a:rPr>
-              <a:t>   conf 0.85</a:t>
+              <a:t>   85% sure</a:t>
             </a:r>
           </a:p>
         </p:txBody>
@@ -11624,22 +11401,22 @@
               </a:spcAft>
             </a:pPr>
             <a:r>
-              <a:rPr sz="800" b="0">
+              <a:rPr sz="850" b="0">
                 <a:solidFill>
                   <a:srgbClr val="71717A"/>
                 </a:solidFill>
+                <a:latin typeface="Inter"/>
+              </a:rPr>
+              <a:t>Proof it points at:  </a:t>
+            </a:r>
+            <a:r>
+              <a:rPr sz="850" b="0">
+                <a:solidFill>
+                  <a:srgbClr val="22C55E"/>
+                </a:solidFill>
                 <a:latin typeface="Consolas"/>
               </a:rPr>
-              <a:t>evidence_refs: </a:t>
-            </a:r>
-            <a:r>
-              <a:rPr sz="800" b="0">
-                <a:solidFill>
-                  <a:srgbClr val="22C55E"/>
-                </a:solidFill>
-                <a:latin typeface="Consolas"/>
-              </a:rPr>
-              <a:t>CUST_018-S00, S01, S02, S03, rm_notes.txt</a:t>
+              <a:t>payments S00, S01, S02, S03  ·  the banker's notes</a:t>
             </a:r>
           </a:p>
           <a:p>
@@ -11652,22 +11429,22 @@
               </a:spcAft>
             </a:pPr>
             <a:r>
-              <a:rPr sz="800" b="0">
+              <a:rPr sz="850" b="0">
                 <a:solidFill>
                   <a:srgbClr val="71717A"/>
                 </a:solidFill>
-                <a:latin typeface="Consolas"/>
-              </a:rPr>
-              <a:t>key_signals: </a:t>
-            </a:r>
-            <a:r>
-              <a:rPr sz="800" b="0">
+                <a:latin typeface="Inter"/>
+              </a:rPr>
+              <a:t>Why:  </a:t>
+            </a:r>
+            <a:r>
+              <a:rPr sz="850" b="0">
                 <a:solidFill>
                   <a:srgbClr val="A1A1AA"/>
                 </a:solidFill>
-                <a:latin typeface="Consolas"/>
-              </a:rPr>
-              <a:t>Iran high-risk jurisdiction · arms dealer occupation · confirmed structuring ($37k across 4 deposits in 6 days)</a:t>
+                <a:latin typeface="Inter"/>
+              </a:rPr>
+              <a:t>home country carries elevated risk · line of work is high-risk · four cash deposits totalling $37k, each kept just under the reporting limit, all inside six days</a:t>
             </a:r>
           </a:p>
         </p:txBody>
@@ -11709,7 +11486,7 @@
                 </a:solidFill>
                 <a:latin typeface="Inter"/>
               </a:rPr>
-              <a:t>FOUR GUARDRAILS THAT MAKE IT TRUSTWORTHY</a:t>
+              <a:t>FOUR RULES IT IS NOT ALLOWED TO BREAK</a:t>
             </a:r>
           </a:p>
         </p:txBody>
@@ -11799,7 +11576,7 @@
                 </a:solidFill>
                 <a:latin typeface="Inter"/>
               </a:rPr>
-              <a:t>Citation check</a:t>
+              <a:t>It cannot make up proof</a:t>
             </a:r>
           </a:p>
         </p:txBody>
@@ -11841,7 +11618,7 @@
                 </a:solidFill>
                 <a:latin typeface="Inter"/>
               </a:rPr>
-              <a:t>evidence_refs validated against what the tools actually returned — fabrications rejected</a:t>
+              <a:t>every reference is checked against what the tools really returned — invented ones are thrown out</a:t>
             </a:r>
           </a:p>
         </p:txBody>
@@ -11931,7 +11708,7 @@
                 </a:solidFill>
                 <a:latin typeface="Inter"/>
               </a:rPr>
-              <a:t>Bounded loop</a:t>
+              <a:t>It cannot ramble forever</a:t>
             </a:r>
           </a:p>
         </p:txBody>
@@ -11973,7 +11750,7 @@
                 </a:solidFill>
                 <a:latin typeface="Inter"/>
               </a:rPr>
-              <a:t>12 steps max; exceeding it routes to a human, never loops forever</a:t>
+              <a:t>12 steps maximum; run past that and a person picks it up</a:t>
             </a:r>
           </a:p>
         </p:txBody>
@@ -12063,7 +11840,7 @@
                 </a:solidFill>
                 <a:latin typeface="Inter"/>
               </a:rPr>
-              <a:t>Never blank</a:t>
+              <a:t>It cannot come back empty</a:t>
             </a:r>
           </a:p>
         </p:txBody>
@@ -12105,7 +11882,7 @@
                 </a:solidFill>
                 <a:latin typeface="Inter"/>
               </a:rPr>
-              <a:t>any exception still produces a valid decision, routed to review</a:t>
+              <a:t>even if something crashes, you still get a real decision, routed to a person</a:t>
             </a:r>
           </a:p>
         </p:txBody>
@@ -12195,7 +11972,7 @@
                 </a:solidFill>
                 <a:latin typeface="Inter"/>
               </a:rPr>
-              <a:t>Facts, not verdicts</a:t>
+              <a:t>Tools suggest, AI decides</a:t>
             </a:r>
           </a:p>
         </p:txBody>
@@ -12237,7 +12014,7 @@
                 </a:solidFill>
                 <a:latin typeface="Inter"/>
               </a:rPr>
-              <a:t>find_txn_patterns returns candidates the agent must judge and cite</a:t>
+              <a:t>the pattern scanner only says “this looks odd” — the AI has to agree and point at the rows</a:t>
             </a:r>
           </a:p>
         </p:txBody>
@@ -12279,7 +12056,7 @@
                 </a:solidFill>
                 <a:latin typeface="Inter"/>
               </a:rPr>
-              <a:t>IT WORKS END-TO-END</a:t>
+              <a:t>AND IT RAN THE WHOLE BOOK, START TO FINISH</a:t>
             </a:r>
           </a:p>
         </p:txBody>
@@ -12369,7 +12146,7 @@
                 </a:solidFill>
                 <a:latin typeface="Inter"/>
               </a:rPr>
-              <a:t>SCORED</a:t>
+              <a:t>CUSTOMERS</a:t>
             </a:r>
           </a:p>
         </p:txBody>
@@ -12501,7 +12278,7 @@
                 </a:solidFill>
                 <a:latin typeface="Inter"/>
               </a:rPr>
-              <a:t>AUTO-CLEARED</a:t>
+              <a:t>CLEARED ON ITS OWN</a:t>
             </a:r>
           </a:p>
         </p:txBody>
@@ -12633,7 +12410,7 @@
                 </a:solidFill>
                 <a:latin typeface="Inter"/>
               </a:rPr>
-              <a:t>ESCALATED</a:t>
+              <a:t>SENT UP</a:t>
             </a:r>
           </a:p>
         </p:txBody>
@@ -12765,7 +12542,7 @@
                 </a:solidFill>
                 <a:latin typeface="Inter"/>
               </a:rPr>
-              <a:t>TO A HUMAN</a:t>
+              <a:t>ASKED A HUMAN</a:t>
             </a:r>
           </a:p>
         </p:txBody>
@@ -12897,7 +12674,7 @@
                 </a:solidFill>
                 <a:latin typeface="Inter"/>
               </a:rPr>
-              <a:t>TESTS</a:t>
+              <a:t>TESTS PASS</a:t>
             </a:r>
           </a:p>
         </p:txBody>
@@ -12981,7 +12758,7 @@
                 </a:solidFill>
                 <a:latin typeface="Inter"/>
               </a:rPr>
-              <a:t>SAME AGENT, OPPOSITE ENDS OF THE QUEUE</a:t>
+              <a:t>SAME AI, TWO VERY DIFFERENT CUSTOMERS</a:t>
             </a:r>
           </a:p>
         </p:txBody>
@@ -13080,7 +12857,7 @@
                 </a:solidFill>
                 <a:latin typeface="Inter"/>
               </a:rPr>
-              <a:t>  arms dealer, Iran → </a:t>
+              <a:t>  odd cash, odd story → </a:t>
             </a:r>
             <a:r>
               <a:rPr sz="950" b="1">
@@ -13089,7 +12866,7 @@
                 </a:solidFill>
                 <a:latin typeface="Inter"/>
               </a:rPr>
-              <a:t>83 HIGH / ESCALATE</a:t>
+              <a:t>83 · SEND TO A SENIOR</a:t>
             </a:r>
             <a:r>
               <a:rPr sz="850" b="0">
@@ -13098,7 +12875,7 @@
                 </a:solidFill>
                 <a:latin typeface="Inter"/>
               </a:rPr>
-              <a:t> @ 0.85</a:t>
+              <a:t> · 85% sure</a:t>
             </a:r>
           </a:p>
         </p:txBody>
@@ -13197,7 +12974,7 @@
                 </a:solidFill>
                 <a:latin typeface="Inter"/>
               </a:rPr>
-              <a:t>  UK teacher, salary → </a:t>
+              <a:t>  teacher, salary in, rent out → </a:t>
             </a:r>
             <a:r>
               <a:rPr sz="950" b="1">
@@ -13206,7 +12983,7 @@
                 </a:solidFill>
                 <a:latin typeface="Inter"/>
               </a:rPr>
-              <a:t>5 LOW / AUTO_CLEAR</a:t>
+              <a:t>5 · CLEARED</a:t>
             </a:r>
             <a:r>
               <a:rPr sz="850" b="0">
@@ -13215,7 +12992,7 @@
                 </a:solidFill>
                 <a:latin typeface="Inter"/>
               </a:rPr>
-              <a:t> @ 0.95</a:t>
+              <a:t> · 95% sure</a:t>
             </a:r>
           </a:p>
         </p:txBody>
@@ -13327,7 +13104,7 @@
                 </a:solidFill>
                 <a:latin typeface="Inter"/>
               </a:rPr>
-              <a:t>04 · HUMAN-IN-THE-LOOP</a:t>
+              <a:t>04 · WHERE PEOPLE COME IN</a:t>
             </a:r>
           </a:p>
         </p:txBody>
@@ -13369,7 +13146,7 @@
                 </a:solidFill>
                 <a:latin typeface="Inter"/>
               </a:rPr>
-              <a:t>The flywheel: uncertainty becomes training signal</a:t>
+              <a:t>When it is unsure, it asks. And it remembers your answer.</a:t>
             </a:r>
           </a:p>
         </p:txBody>
@@ -13411,7 +13188,7 @@
                 </a:solidFill>
                 <a:latin typeface="Inter"/>
               </a:rPr>
-              <a:t>Confidence gates the outcome. What the human corrects, the system remembers — three different ways.</a:t>
+              <a:t>The AI says how sure it is. If it is not sure enough, a person decides instead — and that correction makes the whole system better, three different ways.</a:t>
             </a:r>
           </a:p>
         </p:txBody>
@@ -13501,7 +13278,7 @@
                 </a:solidFill>
                 <a:latin typeface="Inter"/>
               </a:rPr>
-              <a:t>RiskFinding</a:t>
+              <a:t>A decision</a:t>
             </a:r>
           </a:p>
           <a:p>
@@ -13520,7 +13297,7 @@
                 </a:solidFill>
                 <a:latin typeface="Inter"/>
               </a:rPr>
-              <a:t>+ self-reported confidence</a:t>
+              <a:t>+ how sure the AI says it is</a:t>
             </a:r>
           </a:p>
         </p:txBody>
@@ -13654,7 +13431,7 @@
                 </a:solidFill>
                 <a:latin typeface="Inter"/>
               </a:rPr>
-              <a:t>confidence ≥ 0.60 ?</a:t>
+              <a:t>at least 60% sure?</a:t>
             </a:r>
           </a:p>
         </p:txBody>
@@ -13753,7 +13530,7 @@
                 </a:solidFill>
                 <a:latin typeface="Inter"/>
               </a:rPr>
-              <a:t>auto-dispose by band</a:t>
+              <a:t>it decides on its own</a:t>
             </a:r>
           </a:p>
         </p:txBody>
@@ -13852,7 +13629,7 @@
                 </a:solidFill>
                 <a:latin typeface="Inter"/>
               </a:rPr>
-              <a:t>Redis review queue</a:t>
+              <a:t>it goes in a person's queue</a:t>
             </a:r>
           </a:p>
         </p:txBody>
@@ -13986,7 +13763,7 @@
                 </a:solidFill>
                 <a:latin typeface="Inter"/>
               </a:rPr>
-              <a:t>Human sets the correct score</a:t>
+              <a:t>A person sets the right answer</a:t>
             </a:r>
           </a:p>
           <a:p>
@@ -14005,7 +13782,7 @@
                 </a:solidFill>
                 <a:latin typeface="Inter"/>
               </a:rPr>
-              <a:t>nothing is hidden from the reviewer</a:t>
+              <a:t>and sees everything the AI saw</a:t>
             </a:r>
           </a:p>
         </p:txBody>
@@ -14095,7 +13872,7 @@
                 </a:solidFill>
                 <a:latin typeface="Inter"/>
               </a:rPr>
-              <a:t>WHY GATE ON CONFIDENCE, NOT SCORE</a:t>
+              <a:t>WHY WE ASK “HOW SURE?” AND NOT “HOW BAD?”</a:t>
             </a:r>
           </a:p>
         </p:txBody>
@@ -14137,7 +13914,7 @@
                 </a:solidFill>
                 <a:latin typeface="Inter"/>
               </a:rPr>
-              <a:t>A score of 58 is not automatically uncertain — the agent may be very confident it is a 58. What matters is whether </a:t>
+              <a:t>A middling score is not automatically a doubtful one — the AI can be very sure a customer is a plain, boring 58. What matters is whether </a:t>
             </a:r>
             <a:r>
               <a:rPr sz="950" b="1">
@@ -14146,7 +13923,7 @@
                 </a:solidFill>
                 <a:latin typeface="Inter"/>
               </a:rPr>
-              <a:t>the evidence supports the conclusion</a:t>
+              <a:t>the evidence really backs the answer</a:t>
             </a:r>
             <a:r>
               <a:rPr sz="950" b="0">
@@ -14155,7 +13932,7 @@
                 </a:solidFill>
                 <a:latin typeface="Inter"/>
               </a:rPr>
-              <a:t>. Confidence is the agent's own self-report, and the prompt tells it that low-confidence cases go to a human — so </a:t>
+              <a:t>. We ask the AI to rate its own certainty and we tell it plainly that shaky cases go to a person — so </a:t>
             </a:r>
             <a:r>
               <a:rPr sz="950" b="1">
@@ -14164,7 +13941,7 @@
                 </a:solidFill>
                 <a:latin typeface="Inter"/>
               </a:rPr>
-              <a:t>admitting uncertainty is the rewarded behaviour</a:t>
+              <a:t>owning up to doubt is the winning move</a:t>
             </a:r>
             <a:r>
               <a:rPr sz="950" b="0">
@@ -14173,7 +13950,7 @@
                 </a:solidFill>
                 <a:latin typeface="Inter"/>
               </a:rPr>
-              <a:t>.</a:t>
+              <a:t>, not a failure.</a:t>
             </a:r>
           </a:p>
         </p:txBody>
@@ -14263,7 +14040,7 @@
                 </a:solidFill>
                 <a:latin typeface="Inter"/>
               </a:rPr>
-              <a:t>WHAT THE REVIEWER SEES — NOTHING IS HIDDEN</a:t>
+              <a:t>THE PERSON SEES EVERYTHING — NOTHING IS HIDDEN</a:t>
             </a:r>
           </a:p>
         </p:txBody>
@@ -14305,7 +14082,7 @@
                 </a:solidFill>
                 <a:latin typeface="Inter"/>
               </a:rPr>
-              <a:t>The proposed score and confidence · all three specialist opinions, including where they disagreed · the complete tool-call trace · the agent's own working notes · the memory that was injected into the prompt.</a:t>
+              <a:t>The suggested score and how sure it was · all three specialists' views, including where they disagreed · every step it took · the notes it wrote itself · and exactly what it remembered before starting.</a:t>
             </a:r>
           </a:p>
         </p:txBody>
@@ -14347,7 +14124,7 @@
                 </a:solidFill>
                 <a:latin typeface="Inter"/>
               </a:rPr>
-              <a:t>ONE CORRECTION → THREE LEARNING PATHS</a:t>
+              <a:t>ONE CORRECTION TEACHES IT THREE WAYS</a:t>
             </a:r>
           </a:p>
         </p:txBody>
@@ -14481,7 +14258,7 @@
                 </a:solidFill>
                 <a:latin typeface="Inter"/>
               </a:rPr>
-              <a:t>1 · human-verified episode</a:t>
+              <a:t>1 · a worked example</a:t>
             </a:r>
           </a:p>
         </p:txBody>
@@ -14523,7 +14300,7 @@
                 </a:solidFill>
                 <a:latin typeface="Inter"/>
               </a:rPr>
-              <a:t>future similar customers retrieve it as a few-shot example</a:t>
+              <a:t>the next customer who looks like this gets shown your answer</a:t>
             </a:r>
           </a:p>
         </p:txBody>
@@ -14657,7 +14434,7 @@
                 </a:solidFill>
                 <a:latin typeface="Inter"/>
               </a:rPr>
-              <a:t>2 · a lesson (frisk reflect)</a:t>
+              <a:t>2 · a written lesson</a:t>
             </a:r>
           </a:p>
         </p:txBody>
@@ -14699,7 +14476,7 @@
                 </a:solidFill>
                 <a:latin typeface="Inter"/>
               </a:rPr>
-              <a:t>distilled and injected into every future orchestrator prompt</a:t>
+              <a:t>turned into a rule of thumb it reads before every future case</a:t>
             </a:r>
           </a:p>
         </p:txBody>
@@ -14833,7 +14610,7 @@
                 </a:solidFill>
                 <a:latin typeface="Inter"/>
               </a:rPr>
-              <a:t>3 · a row in customer history</a:t>
+              <a:t>3 · a note on that person's file</a:t>
             </a:r>
           </a:p>
         </p:txBody>
@@ -14875,7 +14652,7 @@
                 </a:solidFill>
                 <a:latin typeface="Inter"/>
               </a:rPr>
-              <a:t>the next assessment of that customer sees what changed</a:t>
+              <a:t>next time this customer comes round, it sees what changed</a:t>
             </a:r>
           </a:p>
         </p:txBody>
@@ -14917,7 +14694,7 @@
                 </a:solidFill>
                 <a:latin typeface="Inter"/>
               </a:rPr>
-              <a:t>Most systems have one of these. Three means one correction improves </a:t>
+              <a:t>Most systems manage one of these. Three means your single correction improves </a:t>
             </a:r>
             <a:r>
               <a:rPr sz="850" b="1">
@@ -14926,7 +14703,7 @@
                 </a:solidFill>
                 <a:latin typeface="Inter"/>
               </a:rPr>
-              <a:t>similar cases, all cases, and this case</a:t>
+              <a:t>similar cases, every case, and this one</a:t>
             </a:r>
             <a:r>
               <a:rPr sz="850" b="0">
@@ -14935,7 +14712,7 @@
                 </a:solidFill>
                 <a:latin typeface="Inter"/>
               </a:rPr>
-              <a:t> at once.</a:t>
+              <a:t>.</a:t>
             </a:r>
           </a:p>
         </p:txBody>
@@ -15025,7 +14802,7 @@
                 </a:solidFill>
                 <a:latin typeface="Inter"/>
               </a:rPr>
-              <a:t>ANTI-ECHO-CHAMBER GUARD</a:t>
+              <a:t>IT ONLY LEARNS FROM PEOPLE, NEVER FROM ITSELF</a:t>
             </a:r>
           </a:p>
         </p:txBody>
@@ -15067,7 +14844,7 @@
                 </a:solidFill>
                 <a:latin typeface="Inter"/>
               </a:rPr>
-              <a:t>Episodic few-shot draws only from human-verified cases. The system never learns from its own unreviewed output, so its mistakes cannot compound into false precedent. Every decision — cleared as well as escalated — is written to an append-only audit log.</a:t>
+              <a:t>It only copies from cases a human actually checked. If it were allowed to learn from its own unchecked work, one early mistake would quietly become the house rule. Every decision — cleared or escalated — is written down permanently and cannot be edited later.</a:t>
             </a:r>
           </a:p>
         </p:txBody>
@@ -15179,7 +14956,7 @@
                 </a:solidFill>
                 <a:latin typeface="Inter"/>
               </a:rPr>
-              <a:t>05 · CHALLENGES &amp; LEARNINGS</a:t>
+              <a:t>05 · WHAT BROKE, AND WHAT WE LEARNED</a:t>
             </a:r>
           </a:p>
         </p:txBody>
@@ -15221,7 +14998,7 @@
                 </a:solidFill>
                 <a:latin typeface="Inter"/>
               </a:rPr>
-              <a:t>Four things that broke, and what they taught</a:t>
+              <a:t>Four things went wrong. Each one made the design better.</a:t>
             </a:r>
           </a:p>
         </p:txBody>
@@ -15263,7 +15040,7 @@
                 </a:solidFill>
                 <a:latin typeface="Inter"/>
               </a:rPr>
-              <a:t>Each challenge below changed the design — these are not hypotheticals, they are bugs that shipped and were fixed.</a:t>
+              <a:t>These are not hypotheticals — they are real bugs that shipped, got caught, and got fixed.</a:t>
             </a:r>
           </a:p>
         </p:txBody>
@@ -15305,7 +15082,7 @@
                 </a:solidFill>
                 <a:latin typeface="Inter"/>
               </a:rPr>
-              <a:t>CHALLENGES THAT CHANGED THE DESIGN</a:t>
+              <a:t>WHAT BROKE</a:t>
             </a:r>
           </a:p>
         </p:txBody>
@@ -15439,7 +15216,7 @@
                 </a:solidFill>
                 <a:latin typeface="Inter"/>
               </a:rPr>
-              <a:t>1 · The agent that never finished</a:t>
+              <a:t>1 · The investigator that never wrapped up</a:t>
             </a:r>
           </a:p>
         </p:txBody>
@@ -15453,7 +15230,7 @@
         <p:spPr>
           <a:xfrm>
             <a:off x="749808" y="2103120"/>
-            <a:ext cx="5742432" cy="457200"/>
+            <a:ext cx="5742432" cy="475488"/>
           </a:xfrm>
           <a:prstGeom prst="rect">
             <a:avLst/>
@@ -15481,7 +15258,7 @@
                 </a:solidFill>
                 <a:latin typeface="Inter"/>
               </a:rPr>
-              <a:t>Runs hit the 12-step cap mid-investigation and returned score 0 at confidence 0 — which the router read as a legitimate “uncertain” case. A silent failure disguised as a valid decision.</a:t>
+              <a:t>It ran out of steps mid-investigation and handed back a blank “0, not sure” — which the system happily read as a genuine answer. A failure wearing the costume of a result.</a:t>
             </a:r>
           </a:p>
         </p:txBody>
@@ -15494,7 +15271,7 @@
         </p:nvSpPr>
         <p:spPr>
           <a:xfrm>
-            <a:off x="749808" y="2596896"/>
+            <a:off x="749808" y="2615184"/>
             <a:ext cx="5742432" cy="219456"/>
           </a:xfrm>
           <a:prstGeom prst="rect">
@@ -15523,7 +15300,7 @@
                 </a:solidFill>
                 <a:latin typeface="Inter"/>
               </a:rPr>
-              <a:t>Fix: in the final two turns, finalize is the only bound tool. A bounded loop needs a forced exit, not just a cap.</a:t>
+              <a:t>Fix: in the last two steps, the only thing it is allowed to do is finish. A time limit needs a forced ending, not just a buzzer.</a:t>
             </a:r>
           </a:p>
         </p:txBody>
@@ -15657,7 +15434,7 @@
                 </a:solidFill>
                 <a:latin typeface="Inter"/>
               </a:rPr>
-              <a:t>2 · A deleted feature that would not die</a:t>
+              <a:t>2 · The feature we deleted that kept coming back</a:t>
             </a:r>
           </a:p>
         </p:txBody>
@@ -15671,7 +15448,7 @@
         <p:spPr>
           <a:xfrm>
             <a:off x="749808" y="3255264"/>
-            <a:ext cx="5742432" cy="457200"/>
+            <a:ext cx="5742432" cy="475488"/>
           </a:xfrm>
           <a:prstGeom prst="rect">
             <a:avLst/>
@@ -15699,7 +15476,7 @@
                 </a:solidFill>
                 <a:latin typeface="Inter"/>
               </a:rPr>
-              <a:t>Sanctions screening was cut from scope but kept appearing in output — three ghosts: a {} default in the loader, a stray phrase in a reference file, and a stale LLM cache.</a:t>
+              <a:t>We cut watchlist screening from the project, yet it kept turning up in the output — hiding in three places: a leftover default, a stray sentence in a reference file, and an old cached answer.</a:t>
             </a:r>
           </a:p>
         </p:txBody>
@@ -15712,7 +15489,7 @@
         </p:nvSpPr>
         <p:spPr>
           <a:xfrm>
-            <a:off x="749808" y="3749040"/>
+            <a:off x="749808" y="3767328"/>
             <a:ext cx="5742432" cy="219456"/>
           </a:xfrm>
           <a:prstGeom prst="rect">
@@ -15741,7 +15518,7 @@
                 </a:solidFill>
                 <a:latin typeface="Inter"/>
               </a:rPr>
-              <a:t>Fix: purge data, not just code. Added a scope guard to every prompt, then re-scored all 22 customers to verify zero mentions.</a:t>
+              <a:t>Fix: clear the data, not just the code. Then re-ran all 22 customers to prove it was gone.</a:t>
             </a:r>
           </a:p>
         </p:txBody>
@@ -15875,7 +15652,7 @@
                 </a:solidFill>
                 <a:latin typeface="Inter"/>
               </a:rPr>
-              <a:t>3 · “It must be rate limiting”</a:t>
+              <a:t>3 · “It must be the API throttling us”</a:t>
             </a:r>
           </a:p>
         </p:txBody>
@@ -15889,7 +15666,7 @@
         <p:spPr>
           <a:xfrm>
             <a:off x="749808" y="4407408"/>
-            <a:ext cx="5742432" cy="457200"/>
+            <a:ext cx="5742432" cy="475488"/>
           </a:xfrm>
           <a:prstGeom prst="rect">
             <a:avLst/>
@@ -15917,7 +15694,7 @@
                 </a:solidFill>
                 <a:latin typeface="Inter"/>
               </a:rPr>
-              <a:t>Parallel scoring took 76–90s and I assumed throttling. The data disagreed — no request cap, and 4 concurrent calls took 1.55s vs 1.48s for one. Real cause: serial depth, plus a tool factory rebuilt every call (375ms vs 0.9ms).</a:t>
+              <a:t>Scoring several customers at once took 76–90 seconds and I blamed the provider. The measurements said otherwise: four calls at once took 1.55s versus 1.48s for one. The real cause was our own code rebuilding the same tools on every single call.</a:t>
             </a:r>
           </a:p>
         </p:txBody>
@@ -15930,7 +15707,7 @@
         </p:nvSpPr>
         <p:spPr>
           <a:xfrm>
-            <a:off x="749808" y="4901184"/>
+            <a:off x="749808" y="4919472"/>
             <a:ext cx="5742432" cy="219456"/>
           </a:xfrm>
           <a:prstGeom prst="rect">
@@ -15959,7 +15736,7 @@
                 </a:solidFill>
                 <a:latin typeface="Inter"/>
               </a:rPr>
-              <a:t>Fix: cache the detectors. That path went from 7500ms to 5ms.</a:t>
+              <a:t>Fix: build them once and reuse. That step went from 7.5 seconds to 5 milliseconds.</a:t>
             </a:r>
           </a:p>
         </p:txBody>
@@ -16093,7 +15870,7 @@
                 </a:solidFill>
                 <a:latin typeface="Inter"/>
               </a:rPr>
-              <a:t>4 · Learning from its own homework</a:t>
+              <a:t>4 · It was about to start marking its own homework</a:t>
             </a:r>
           </a:p>
         </p:txBody>
@@ -16107,7 +15884,7 @@
         <p:spPr>
           <a:xfrm>
             <a:off x="749808" y="5559552"/>
-            <a:ext cx="5742432" cy="457200"/>
+            <a:ext cx="5742432" cy="475488"/>
           </a:xfrm>
           <a:prstGeom prst="rect">
             <a:avLst/>
@@ -16135,7 +15912,7 @@
                 </a:solidFill>
                 <a:latin typeface="Inter"/>
               </a:rPr>
-              <a:t>Episodic retrieval would have surfaced the agent's own unreviewed decisions as precedent, compounding any early error into permanent bias.</a:t>
+              <a:t>It would have treated its own unchecked past decisions as precedent — turning one early mistake into a permanent habit.</a:t>
             </a:r>
           </a:p>
         </p:txBody>
@@ -16148,7 +15925,7 @@
         </p:nvSpPr>
         <p:spPr>
           <a:xfrm>
-            <a:off x="749808" y="6053328"/>
+            <a:off x="749808" y="6071616"/>
             <a:ext cx="5742432" cy="219456"/>
           </a:xfrm>
           <a:prstGeom prst="rect">
@@ -16177,7 +15954,7 @@
                 </a:solidFill>
                 <a:latin typeface="Inter"/>
               </a:rPr>
-              <a:t>Fix: restrict episodic retrieval to human-verified cases only.</a:t>
+              <a:t>Fix: it may only learn from cases a real person signed off.</a:t>
             </a:r>
           </a:p>
         </p:txBody>
@@ -16219,7 +15996,7 @@
                 </a:solidFill>
                 <a:latin typeface="Inter"/>
               </a:rPr>
-              <a:t>LEARNINGS</a:t>
+              <a:t>WHAT WE LEARNED</a:t>
             </a:r>
           </a:p>
         </p:txBody>
@@ -16233,7 +16010,7 @@
         <p:spPr>
           <a:xfrm>
             <a:off x="6858000" y="1828800"/>
-            <a:ext cx="4782312" cy="676656"/>
+            <a:ext cx="4782312" cy="694944"/>
           </a:xfrm>
           <a:prstGeom prst="roundRect">
             <a:avLst>
@@ -16309,7 +16086,7 @@
                 </a:solidFill>
                 <a:latin typeface="Inter"/>
               </a:rPr>
-              <a:t>Give the model facts, not verdicts</a:t>
+              <a:t>Hand the AI facts, not conclusions</a:t>
             </a:r>
           </a:p>
         </p:txBody>
@@ -16323,7 +16100,7 @@
         <p:spPr>
           <a:xfrm>
             <a:off x="6995160" y="2093976"/>
-            <a:ext cx="4535424" cy="347472"/>
+            <a:ext cx="4535424" cy="365760"/>
           </a:xfrm>
           <a:prstGeom prst="rect">
             <a:avLst/>
@@ -16351,7 +16128,7 @@
                 </a:solidFill>
                 <a:latin typeface="Inter"/>
               </a:rPr>
-              <a:t>Tools returning candidates the agent must judge and cite produce better reasoning than tools returning conclusions — and the citation is auditable.</a:t>
+              <a:t>Tools that say “this looks odd, here are the rows” get better thinking than tools that say “this is fraud” — and you can check the answer afterwards.</a:t>
             </a:r>
           </a:p>
         </p:txBody>
@@ -16364,8 +16141,8 @@
         </p:nvSpPr>
         <p:spPr>
           <a:xfrm>
-            <a:off x="6858000" y="2596896"/>
-            <a:ext cx="4782312" cy="676656"/>
+            <a:off x="6858000" y="2615184"/>
+            <a:ext cx="4782312" cy="694944"/>
           </a:xfrm>
           <a:prstGeom prst="roundRect">
             <a:avLst>
@@ -16412,7 +16189,7 @@
         </p:nvSpPr>
         <p:spPr>
           <a:xfrm>
-            <a:off x="6995160" y="2660904"/>
+            <a:off x="6995160" y="2679192"/>
             <a:ext cx="4517136" cy="219456"/>
           </a:xfrm>
           <a:prstGeom prst="rect">
@@ -16441,7 +16218,7 @@
                 </a:solidFill>
                 <a:latin typeface="Inter"/>
               </a:rPr>
-              <a:t>Confidence routes better than score</a:t>
+              <a:t>“How sure are you?” beats “how bad is it?”</a:t>
             </a:r>
           </a:p>
         </p:txBody>
@@ -16454,8 +16231,8 @@
         </p:nvSpPr>
         <p:spPr>
           <a:xfrm>
-            <a:off x="6995160" y="2862072"/>
-            <a:ext cx="4535424" cy="347472"/>
+            <a:off x="6995160" y="2880360"/>
+            <a:ext cx="4535424" cy="365760"/>
           </a:xfrm>
           <a:prstGeom prst="rect">
             <a:avLst/>
@@ -16483,7 +16260,7 @@
                 </a:solidFill>
                 <a:latin typeface="Inter"/>
               </a:rPr>
-              <a:t>A confident 58 needs no human; an unsure 30 does. Routing on certainty rather than severity is what makes escalation meaningful.</a:t>
+              <a:t>A confident middling score needs nobody. A shaky low one needs a person. Routing on doubt, not on severity, is what makes escalation mean something.</a:t>
             </a:r>
           </a:p>
         </p:txBody>
@@ -16496,8 +16273,8 @@
         </p:nvSpPr>
         <p:spPr>
           <a:xfrm>
-            <a:off x="6858000" y="3364992"/>
-            <a:ext cx="4782312" cy="676656"/>
+            <a:off x="6858000" y="3401568"/>
+            <a:ext cx="4782312" cy="694944"/>
           </a:xfrm>
           <a:prstGeom prst="roundRect">
             <a:avLst>
@@ -16544,7 +16321,7 @@
         </p:nvSpPr>
         <p:spPr>
           <a:xfrm>
-            <a:off x="6995160" y="3429000"/>
+            <a:off x="6995160" y="3465576"/>
             <a:ext cx="4517136" cy="219456"/>
           </a:xfrm>
           <a:prstGeom prst="rect">
@@ -16573,7 +16350,7 @@
                 </a:solidFill>
                 <a:latin typeface="Inter"/>
               </a:rPr>
-              <a:t>Measure before optimising</a:t>
+              <a:t>Measure before you fix</a:t>
             </a:r>
           </a:p>
         </p:txBody>
@@ -16586,8 +16363,8 @@
         </p:nvSpPr>
         <p:spPr>
           <a:xfrm>
-            <a:off x="6995160" y="3630168"/>
-            <a:ext cx="4535424" cy="347472"/>
+            <a:off x="6995160" y="3666744"/>
+            <a:ext cx="4535424" cy="365760"/>
           </a:xfrm>
           <a:prstGeom prst="rect">
             <a:avLst/>
@@ -16615,7 +16392,7 @@
                 </a:solidFill>
                 <a:latin typeface="Inter"/>
               </a:rPr>
-              <a:t>My first latency diagnosis was wrong, and only measurement showed it. The fix I would have shipped would have addressed nothing.</a:t>
+              <a:t>My first explanation for the slowness was simply wrong, and only the stopwatch showed it. The fix I nearly shipped would have changed nothing.</a:t>
             </a:r>
           </a:p>
         </p:txBody>
@@ -16628,8 +16405,8 @@
         </p:nvSpPr>
         <p:spPr>
           <a:xfrm>
-            <a:off x="6858000" y="4133088"/>
-            <a:ext cx="4782312" cy="676656"/>
+            <a:off x="6858000" y="4187952"/>
+            <a:ext cx="4782312" cy="694944"/>
           </a:xfrm>
           <a:prstGeom prst="roundRect">
             <a:avLst>
@@ -16676,7 +16453,7 @@
         </p:nvSpPr>
         <p:spPr>
           <a:xfrm>
-            <a:off x="6995160" y="4197096"/>
+            <a:off x="6995160" y="4251960"/>
             <a:ext cx="4517136" cy="219456"/>
           </a:xfrm>
           <a:prstGeom prst="rect">
@@ -16705,7 +16482,7 @@
                 </a:solidFill>
                 <a:latin typeface="Inter"/>
               </a:rPr>
-              <a:t>In compliance, the trace is the product</a:t>
+              <a:t>Here, the explanation IS the product</a:t>
             </a:r>
           </a:p>
         </p:txBody>
@@ -16718,8 +16495,8 @@
         </p:nvSpPr>
         <p:spPr>
           <a:xfrm>
-            <a:off x="6995160" y="4398264"/>
-            <a:ext cx="4535424" cy="347472"/>
+            <a:off x="6995160" y="4453128"/>
+            <a:ext cx="4535424" cy="365760"/>
           </a:xfrm>
           <a:prstGeom prst="rect">
             <a:avLst/>
@@ -16747,7 +16524,7 @@
                 </a:solidFill>
                 <a:latin typeface="Inter"/>
               </a:rPr>
-              <a:t>A correct score that cannot be explained is worthless to a regulator. Explainability is not bolted on afterwards; it is the output.</a:t>
+              <a:t>A right answer nobody can explain is worthless to a regulator. Showing the working is not a nice extra bolted on at the end — it is the thing being delivered.</a:t>
             </a:r>
           </a:p>
         </p:txBody>
@@ -16760,7 +16537,7 @@
         </p:nvSpPr>
         <p:spPr>
           <a:xfrm>
-            <a:off x="6858000" y="4974336"/>
+            <a:off x="6858000" y="5029200"/>
             <a:ext cx="4782312" cy="201168"/>
           </a:xfrm>
           <a:prstGeom prst="rect">
@@ -16789,7 +16566,7 @@
                 </a:solidFill>
                 <a:latin typeface="Inter"/>
               </a:rPr>
-              <a:t>HONEST LIMITS → WHAT COMES NEXT</a:t>
+              <a:t>WHAT IS STILL WEAK → AND HOW WE WOULD FIX IT</a:t>
             </a:r>
           </a:p>
         </p:txBody>
@@ -16802,8 +16579,8 @@
         </p:nvSpPr>
         <p:spPr>
           <a:xfrm>
-            <a:off x="6858000" y="5212080"/>
-            <a:ext cx="4782312" cy="292608"/>
+            <a:off x="6858000" y="5266944"/>
+            <a:ext cx="4782312" cy="329184"/>
           </a:xfrm>
           <a:prstGeom prst="roundRect">
             <a:avLst>
@@ -16848,8 +16625,8 @@
         </p:nvSpPr>
         <p:spPr>
           <a:xfrm>
-            <a:off x="6967728" y="5257800"/>
-            <a:ext cx="1965960" cy="201168"/>
+            <a:off x="6967728" y="5294376"/>
+            <a:ext cx="1874519" cy="274320"/>
           </a:xfrm>
           <a:prstGeom prst="rect">
             <a:avLst/>
@@ -16877,7 +16654,7 @@
                 </a:solidFill>
                 <a:latin typeface="Inter"/>
               </a:rPr>
-              <a:t>~45–90s per customer</a:t>
+              <a:t>Takes ~45–90s per customer</a:t>
             </a:r>
           </a:p>
         </p:txBody>
@@ -16890,36 +16667,36 @@
         </p:nvSpPr>
         <p:spPr>
           <a:xfrm>
-            <a:off x="9006840" y="5257800"/>
-            <a:ext cx="2560320" cy="201168"/>
-          </a:xfrm>
-          <a:prstGeom prst="rect">
-            <a:avLst/>
-          </a:prstGeom>
-          <a:noFill/>
-        </p:spPr>
-        <p:txBody>
-          <a:bodyPr wrap="square" lIns="0" rIns="0" tIns="0" bIns="0">
-            <a:spAutoFit/>
-          </a:bodyPr>
-          <a:lstStyle/>
-          <a:p>
-            <a:pPr algn="l">
-              <a:lnSpc>
-                <a:spcPct val="125000"/>
+            <a:off x="8915400" y="5294376"/>
+            <a:ext cx="2633472" cy="292608"/>
+          </a:xfrm>
+          <a:prstGeom prst="rect">
+            <a:avLst/>
+          </a:prstGeom>
+          <a:noFill/>
+        </p:spPr>
+        <p:txBody>
+          <a:bodyPr wrap="square" lIns="0" rIns="0" tIns="0" bIns="0">
+            <a:spAutoFit/>
+          </a:bodyPr>
+          <a:lstStyle/>
+          <a:p>
+            <a:pPr algn="l">
+              <a:lnSpc>
+                <a:spcPct val="110000"/>
               </a:lnSpc>
               <a:spcAft>
                 <a:spcPts val="600"/>
               </a:spcAft>
             </a:pPr>
             <a:r>
-              <a:rPr sz="850" b="0">
+              <a:rPr sz="800" b="0">
                 <a:solidFill>
                   <a:srgbClr val="A1A1AA"/>
                 </a:solidFill>
                 <a:latin typeface="Inter"/>
               </a:rPr>
-              <a:t>batch mode overlaps customers; fewer steps per run</a:t>
+              <a:t>faster hardware, a smaller model for the easy steps, and running many customers side by side — realistically under 15s</a:t>
             </a:r>
           </a:p>
         </p:txBody>
@@ -16932,8 +16709,8 @@
         </p:nvSpPr>
         <p:spPr>
           <a:xfrm>
-            <a:off x="6858000" y="5541264"/>
-            <a:ext cx="4782312" cy="292608"/>
+            <a:off x="6858000" y="5632704"/>
+            <a:ext cx="4782312" cy="329184"/>
           </a:xfrm>
           <a:prstGeom prst="roundRect">
             <a:avLst>
@@ -16978,8 +16755,8 @@
         </p:nvSpPr>
         <p:spPr>
           <a:xfrm>
-            <a:off x="6967728" y="5586984"/>
-            <a:ext cx="1965960" cy="201168"/>
+            <a:off x="6967728" y="5660136"/>
+            <a:ext cx="1874519" cy="274320"/>
           </a:xfrm>
           <a:prstGeom prst="rect">
             <a:avLst/>
@@ -17007,7 +16784,7 @@
                 </a:solidFill>
                 <a:latin typeface="Inter"/>
               </a:rPr>
-              <a:t>Not byte-reproducible</a:t>
+              <a:t>Same input can vary slightly</a:t>
             </a:r>
           </a:p>
         </p:txBody>
@@ -17020,36 +16797,36 @@
         </p:nvSpPr>
         <p:spPr>
           <a:xfrm>
-            <a:off x="9006840" y="5586984"/>
-            <a:ext cx="2560320" cy="201168"/>
-          </a:xfrm>
-          <a:prstGeom prst="rect">
-            <a:avLst/>
-          </a:prstGeom>
-          <a:noFill/>
-        </p:spPr>
-        <p:txBody>
-          <a:bodyPr wrap="square" lIns="0" rIns="0" tIns="0" bIns="0">
-            <a:spAutoFit/>
-          </a:bodyPr>
-          <a:lstStyle/>
-          <a:p>
-            <a:pPr algn="l">
-              <a:lnSpc>
-                <a:spcPct val="125000"/>
+            <a:off x="8915400" y="5660136"/>
+            <a:ext cx="2633472" cy="292608"/>
+          </a:xfrm>
+          <a:prstGeom prst="rect">
+            <a:avLst/>
+          </a:prstGeom>
+          <a:noFill/>
+        </p:spPr>
+        <p:txBody>
+          <a:bodyPr wrap="square" lIns="0" rIns="0" tIns="0" bIns="0">
+            <a:spAutoFit/>
+          </a:bodyPr>
+          <a:lstStyle/>
+          <a:p>
+            <a:pPr algn="l">
+              <a:lnSpc>
+                <a:spcPct val="110000"/>
               </a:lnSpc>
               <a:spcAft>
                 <a:spcPts val="600"/>
               </a:spcAft>
             </a:pPr>
             <a:r>
-              <a:rPr sz="850" b="0">
+              <a:rPr sz="800" b="0">
                 <a:solidFill>
                   <a:srgbClr val="A1A1AA"/>
                 </a:solidFill>
                 <a:latin typeface="Inter"/>
               </a:rPr>
-              <a:t>pin model snapshots; store the full prompt hash</a:t>
+              <a:t>lock the model version and keep a full record of every question asked</a:t>
             </a:r>
           </a:p>
         </p:txBody>
@@ -17062,8 +16839,8 @@
         </p:nvSpPr>
         <p:spPr>
           <a:xfrm>
-            <a:off x="6858000" y="5870448"/>
-            <a:ext cx="4782312" cy="292608"/>
+            <a:off x="6858000" y="5998464"/>
+            <a:ext cx="4782312" cy="329184"/>
           </a:xfrm>
           <a:prstGeom prst="roundRect">
             <a:avLst>
@@ -17108,8 +16885,8 @@
         </p:nvSpPr>
         <p:spPr>
           <a:xfrm>
-            <a:off x="6967728" y="5916168"/>
-            <a:ext cx="1965960" cy="201168"/>
+            <a:off x="6967728" y="6025896"/>
+            <a:ext cx="1874519" cy="274320"/>
           </a:xfrm>
           <a:prstGeom prst="rect">
             <a:avLst/>
@@ -17137,7 +16914,7 @@
                 </a:solidFill>
                 <a:latin typeface="Inter"/>
               </a:rPr>
-              <a:t>Episodic recall is feature-match</a:t>
+              <a:t>Finds similar cases crudely</a:t>
             </a:r>
           </a:p>
         </p:txBody>
@@ -17150,36 +16927,36 @@
         </p:nvSpPr>
         <p:spPr>
           <a:xfrm>
-            <a:off x="9006840" y="5916168"/>
-            <a:ext cx="2560320" cy="201168"/>
-          </a:xfrm>
-          <a:prstGeom prst="rect">
-            <a:avLst/>
-          </a:prstGeom>
-          <a:noFill/>
-        </p:spPr>
-        <p:txBody>
-          <a:bodyPr wrap="square" lIns="0" rIns="0" tIns="0" bIns="0">
-            <a:spAutoFit/>
-          </a:bodyPr>
-          <a:lstStyle/>
-          <a:p>
-            <a:pPr algn="l">
-              <a:lnSpc>
-                <a:spcPct val="125000"/>
+            <a:off x="8915400" y="6025896"/>
+            <a:ext cx="2633472" cy="292608"/>
+          </a:xfrm>
+          <a:prstGeom prst="rect">
+            <a:avLst/>
+          </a:prstGeom>
+          <a:noFill/>
+        </p:spPr>
+        <p:txBody>
+          <a:bodyPr wrap="square" lIns="0" rIns="0" tIns="0" bIns="0">
+            <a:spAutoFit/>
+          </a:bodyPr>
+          <a:lstStyle/>
+          <a:p>
+            <a:pPr algn="l">
+              <a:lnSpc>
+                <a:spcPct val="110000"/>
               </a:lnSpc>
               <a:spcAft>
                 <a:spcPts val="600"/>
               </a:spcAft>
             </a:pPr>
             <a:r>
-              <a:rPr sz="850" b="0">
+              <a:rPr sz="800" b="0">
                 <a:solidFill>
                   <a:srgbClr val="A1A1AA"/>
                 </a:solidFill>
                 <a:latin typeface="Inter"/>
               </a:rPr>
-              <a:t>similar() is deliberately vector-pluggable</a:t>
+              <a:t>swap in proper meaning-based search as the case history grows</a:t>
             </a:r>
           </a:p>
         </p:txBody>
@@ -17192,8 +16969,8 @@
         </p:nvSpPr>
         <p:spPr>
           <a:xfrm>
-            <a:off x="6858000" y="6199632"/>
-            <a:ext cx="4782312" cy="292608"/>
+            <a:off x="6858000" y="6364224"/>
+            <a:ext cx="4782312" cy="329184"/>
           </a:xfrm>
           <a:prstGeom prst="roundRect">
             <a:avLst>
@@ -17238,8 +17015,8 @@
         </p:nvSpPr>
         <p:spPr>
           <a:xfrm>
-            <a:off x="6967728" y="6245352"/>
-            <a:ext cx="1965960" cy="201168"/>
+            <a:off x="6967728" y="6391656"/>
+            <a:ext cx="1874519" cy="274320"/>
           </a:xfrm>
           <a:prstGeom prst="rect">
             <a:avLst/>
@@ -17267,7 +17044,7 @@
                 </a:solidFill>
                 <a:latin typeface="Inter"/>
               </a:rPr>
-              <a:t>Fixed 0.60 confidence gate</a:t>
+              <a:t>The 60% cut-off is a guess</a:t>
             </a:r>
           </a:p>
         </p:txBody>
@@ -17280,36 +17057,36 @@
         </p:nvSpPr>
         <p:spPr>
           <a:xfrm>
-            <a:off x="9006840" y="6245352"/>
-            <a:ext cx="2560320" cy="201168"/>
-          </a:xfrm>
-          <a:prstGeom prst="rect">
-            <a:avLst/>
-          </a:prstGeom>
-          <a:noFill/>
-        </p:spPr>
-        <p:txBody>
-          <a:bodyPr wrap="square" lIns="0" rIns="0" tIns="0" bIns="0">
-            <a:spAutoFit/>
-          </a:bodyPr>
-          <a:lstStyle/>
-          <a:p>
-            <a:pPr algn="l">
-              <a:lnSpc>
-                <a:spcPct val="125000"/>
+            <a:off x="8915400" y="6391656"/>
+            <a:ext cx="2633472" cy="292608"/>
+          </a:xfrm>
+          <a:prstGeom prst="rect">
+            <a:avLst/>
+          </a:prstGeom>
+          <a:noFill/>
+        </p:spPr>
+        <p:txBody>
+          <a:bodyPr wrap="square" lIns="0" rIns="0" tIns="0" bIns="0">
+            <a:spAutoFit/>
+          </a:bodyPr>
+          <a:lstStyle/>
+          <a:p>
+            <a:pPr algn="l">
+              <a:lnSpc>
+                <a:spcPct val="110000"/>
               </a:lnSpc>
               <a:spcAft>
                 <a:spcPts val="600"/>
               </a:spcAft>
             </a:pPr>
             <a:r>
-              <a:rPr sz="850" b="0">
+              <a:rPr sz="800" b="0">
                 <a:solidFill>
                   <a:srgbClr val="A1A1AA"/>
                 </a:solidFill>
                 <a:latin typeface="Inter"/>
               </a:rPr>
-              <a:t>calibrate against accumulated human corrections</a:t>
+              <a:t>tune it against real corrections once enough have piled up</a:t>
             </a:r>
           </a:p>
         </p:txBody>

--- a/docs/deck/deck.pptx
+++ b/docs/deck/deck.pptx
@@ -6664,7 +6664,7 @@
                 </a:solidFill>
                 <a:latin typeface="Inter"/>
               </a:rPr>
-              <a:t>Four steps per customer. There is no scoring formula anywhere in the code — the AI decides the number. The code just hands it the right tools, the right memory, and a set of rules it cannot break.</a:t>
+              <a:t>Four steps per customer. No scoring formula anywhere in the code — the AI decides the number; the code hands it the tools, the memory, and rules it cannot break.</a:t>
             </a:r>
           </a:p>
         </p:txBody>
@@ -8460,7 +8460,7 @@
         <p:spPr>
           <a:xfrm>
             <a:off x="6565392" y="3447288"/>
-            <a:ext cx="1371600" cy="219456"/>
+            <a:ext cx="1170432" cy="219456"/>
           </a:xfrm>
           <a:prstGeom prst="rect">
             <a:avLst/>
@@ -8501,8 +8501,8 @@
         </p:nvSpPr>
         <p:spPr>
           <a:xfrm>
-            <a:off x="8092440" y="3447288"/>
-            <a:ext cx="2377440" cy="219456"/>
+            <a:off x="7772400" y="3456432"/>
+            <a:ext cx="1481328" cy="219456"/>
           </a:xfrm>
           <a:prstGeom prst="rect">
             <a:avLst/>
@@ -8524,27 +8524,69 @@
               </a:spcAft>
             </a:pPr>
             <a:r>
+              <a:rPr sz="750" b="0">
+                <a:solidFill>
+                  <a:srgbClr val="F97316"/>
+                </a:solidFill>
+                <a:latin typeface="Consolas"/>
+              </a:rPr>
+              <a:t>working memory</a:t>
+            </a:r>
+          </a:p>
+        </p:txBody>
+      </p:sp>
+      <p:sp>
+        <p:nvSpPr>
+          <p:cNvPr id="43" name="TextBox 42"/>
+          <p:cNvSpPr txBox="1"/>
+          <p:nvPr/>
+        </p:nvSpPr>
+        <p:spPr>
+          <a:xfrm>
+            <a:off x="9308592" y="3447288"/>
+            <a:ext cx="1536192" cy="219456"/>
+          </a:xfrm>
+          <a:prstGeom prst="rect">
+            <a:avLst/>
+          </a:prstGeom>
+          <a:noFill/>
+        </p:spPr>
+        <p:txBody>
+          <a:bodyPr wrap="square" lIns="0" rIns="0" tIns="0" bIns="0">
+            <a:spAutoFit/>
+          </a:bodyPr>
+          <a:lstStyle/>
+          <a:p>
+            <a:pPr algn="l">
+              <a:lnSpc>
+                <a:spcPct val="125000"/>
+              </a:lnSpc>
+              <a:spcAft>
+                <a:spcPts val="600"/>
+              </a:spcAft>
+            </a:pPr>
+            <a:r>
               <a:rPr sz="850" b="0">
                 <a:solidFill>
                   <a:srgbClr val="A1A1AA"/>
                 </a:solidFill>
                 <a:latin typeface="Inter"/>
               </a:rPr>
-              <a:t>notes it takes while working</a:t>
-            </a:r>
-          </a:p>
-        </p:txBody>
-      </p:sp>
-      <p:sp>
-        <p:nvSpPr>
-          <p:cNvPr id="43" name="TextBox 42"/>
-          <p:cNvSpPr txBox="1"/>
-          <p:nvPr/>
-        </p:nvSpPr>
-        <p:spPr>
-          <a:xfrm>
-            <a:off x="10515600" y="3447288"/>
-            <a:ext cx="1097280" cy="219456"/>
+              <a:t>notes it takes as it goes</a:t>
+            </a:r>
+          </a:p>
+        </p:txBody>
+      </p:sp>
+      <p:sp>
+        <p:nvSpPr>
+          <p:cNvPr id="44" name="TextBox 43"/>
+          <p:cNvSpPr txBox="1"/>
+          <p:nvPr/>
+        </p:nvSpPr>
+        <p:spPr>
+          <a:xfrm>
+            <a:off x="10899648" y="3456432"/>
+            <a:ext cx="731520" cy="219456"/>
           </a:xfrm>
           <a:prstGeom prst="rect">
             <a:avLst/>
@@ -8566,7 +8608,7 @@
               </a:spcAft>
             </a:pPr>
             <a:r>
-              <a:rPr sz="800" b="0">
+              <a:rPr sz="750" b="0">
                 <a:solidFill>
                   <a:srgbClr val="71717A"/>
                 </a:solidFill>
@@ -8579,7 +8621,7 @@
       </p:sp>
       <p:sp>
         <p:nvSpPr>
-          <p:cNvPr id="44" name="Rounded Rectangle 43"/>
+          <p:cNvPr id="45" name="Rounded Rectangle 44"/>
           <p:cNvSpPr/>
           <p:nvPr/>
         </p:nvSpPr>
@@ -8625,7 +8667,7 @@
       </p:sp>
       <p:sp>
         <p:nvSpPr>
-          <p:cNvPr id="45" name="Rounded Rectangle 44"/>
+          <p:cNvPr id="46" name="Rounded Rectangle 45"/>
           <p:cNvSpPr/>
           <p:nvPr/>
         </p:nvSpPr>
@@ -8671,14 +8713,14 @@
       </p:sp>
       <p:sp>
         <p:nvSpPr>
-          <p:cNvPr id="46" name="TextBox 45"/>
+          <p:cNvPr id="47" name="TextBox 46"/>
           <p:cNvSpPr txBox="1"/>
           <p:nvPr/>
         </p:nvSpPr>
         <p:spPr>
           <a:xfrm>
             <a:off x="6565392" y="3785616"/>
-            <a:ext cx="1371600" cy="219456"/>
+            <a:ext cx="1170432" cy="219456"/>
           </a:xfrm>
           <a:prstGeom prst="rect">
             <a:avLst/>
@@ -8713,14 +8755,14 @@
       </p:sp>
       <p:sp>
         <p:nvSpPr>
-          <p:cNvPr id="47" name="TextBox 46"/>
-          <p:cNvSpPr txBox="1"/>
-          <p:nvPr/>
-        </p:nvSpPr>
-        <p:spPr>
-          <a:xfrm>
-            <a:off x="8092440" y="3785616"/>
-            <a:ext cx="2377440" cy="219456"/>
+          <p:cNvPr id="48" name="TextBox 47"/>
+          <p:cNvSpPr txBox="1"/>
+          <p:nvPr/>
+        </p:nvSpPr>
+        <p:spPr>
+          <a:xfrm>
+            <a:off x="7772400" y="3794760"/>
+            <a:ext cx="1481328" cy="219456"/>
           </a:xfrm>
           <a:prstGeom prst="rect">
             <a:avLst/>
@@ -8742,6 +8784,48 @@
               </a:spcAft>
             </a:pPr>
             <a:r>
+              <a:rPr sz="750" b="0">
+                <a:solidFill>
+                  <a:srgbClr val="71717A"/>
+                </a:solidFill>
+                <a:latin typeface="Consolas"/>
+              </a:rPr>
+              <a:t>per-customer history</a:t>
+            </a:r>
+          </a:p>
+        </p:txBody>
+      </p:sp>
+      <p:sp>
+        <p:nvSpPr>
+          <p:cNvPr id="49" name="TextBox 48"/>
+          <p:cNvSpPr txBox="1"/>
+          <p:nvPr/>
+        </p:nvSpPr>
+        <p:spPr>
+          <a:xfrm>
+            <a:off x="9308592" y="3785616"/>
+            <a:ext cx="1536192" cy="219456"/>
+          </a:xfrm>
+          <a:prstGeom prst="rect">
+            <a:avLst/>
+          </a:prstGeom>
+          <a:noFill/>
+        </p:spPr>
+        <p:txBody>
+          <a:bodyPr wrap="square" lIns="0" rIns="0" tIns="0" bIns="0">
+            <a:spAutoFit/>
+          </a:bodyPr>
+          <a:lstStyle/>
+          <a:p>
+            <a:pPr algn="l">
+              <a:lnSpc>
+                <a:spcPct val="125000"/>
+              </a:lnSpc>
+              <a:spcAft>
+                <a:spcPts val="600"/>
+              </a:spcAft>
+            </a:pPr>
+            <a:r>
               <a:rPr sz="850" b="0">
                 <a:solidFill>
                   <a:srgbClr val="A1A1AA"/>
@@ -8755,14 +8839,14 @@
       </p:sp>
       <p:sp>
         <p:nvSpPr>
-          <p:cNvPr id="48" name="TextBox 47"/>
-          <p:cNvSpPr txBox="1"/>
-          <p:nvPr/>
-        </p:nvSpPr>
-        <p:spPr>
-          <a:xfrm>
-            <a:off x="10515600" y="3785616"/>
-            <a:ext cx="1097280" cy="219456"/>
+          <p:cNvPr id="50" name="TextBox 49"/>
+          <p:cNvSpPr txBox="1"/>
+          <p:nvPr/>
+        </p:nvSpPr>
+        <p:spPr>
+          <a:xfrm>
+            <a:off x="10899648" y="3794760"/>
+            <a:ext cx="731520" cy="219456"/>
           </a:xfrm>
           <a:prstGeom prst="rect">
             <a:avLst/>
@@ -8784,20 +8868,20 @@
               </a:spcAft>
             </a:pPr>
             <a:r>
-              <a:rPr sz="800" b="0">
+              <a:rPr sz="750" b="0">
                 <a:solidFill>
                   <a:srgbClr val="71717A"/>
                 </a:solidFill>
                 <a:latin typeface="Inter"/>
               </a:rPr>
-              <a:t>kept forever</a:t>
-            </a:r>
-          </a:p>
-        </p:txBody>
-      </p:sp>
-      <p:sp>
-        <p:nvSpPr>
-          <p:cNvPr id="49" name="Rounded Rectangle 48"/>
+              <a:t>kept</a:t>
+            </a:r>
+          </a:p>
+        </p:txBody>
+      </p:sp>
+      <p:sp>
+        <p:nvSpPr>
+          <p:cNvPr id="51" name="Rounded Rectangle 50"/>
           <p:cNvSpPr/>
           <p:nvPr/>
         </p:nvSpPr>
@@ -8843,7 +8927,7 @@
       </p:sp>
       <p:sp>
         <p:nvSpPr>
-          <p:cNvPr id="50" name="Rounded Rectangle 49"/>
+          <p:cNvPr id="52" name="Rounded Rectangle 51"/>
           <p:cNvSpPr/>
           <p:nvPr/>
         </p:nvSpPr>
@@ -8889,14 +8973,14 @@
       </p:sp>
       <p:sp>
         <p:nvSpPr>
-          <p:cNvPr id="51" name="TextBox 50"/>
+          <p:cNvPr id="53" name="TextBox 52"/>
           <p:cNvSpPr txBox="1"/>
           <p:nvPr/>
         </p:nvSpPr>
         <p:spPr>
           <a:xfrm>
             <a:off x="6565392" y="4123944"/>
-            <a:ext cx="1371600" cy="219456"/>
+            <a:ext cx="1170432" cy="219456"/>
           </a:xfrm>
           <a:prstGeom prst="rect">
             <a:avLst/>
@@ -8931,14 +9015,14 @@
       </p:sp>
       <p:sp>
         <p:nvSpPr>
-          <p:cNvPr id="52" name="TextBox 51"/>
-          <p:cNvSpPr txBox="1"/>
-          <p:nvPr/>
-        </p:nvSpPr>
-        <p:spPr>
-          <a:xfrm>
-            <a:off x="8092440" y="4123944"/>
-            <a:ext cx="2377440" cy="219456"/>
+          <p:cNvPr id="54" name="TextBox 53"/>
+          <p:cNvSpPr txBox="1"/>
+          <p:nvPr/>
+        </p:nvSpPr>
+        <p:spPr>
+          <a:xfrm>
+            <a:off x="7772400" y="4133088"/>
+            <a:ext cx="1481328" cy="219456"/>
           </a:xfrm>
           <a:prstGeom prst="rect">
             <a:avLst/>
@@ -8960,6 +9044,48 @@
               </a:spcAft>
             </a:pPr>
             <a:r>
+              <a:rPr sz="750" b="0">
+                <a:solidFill>
+                  <a:srgbClr val="14B8A6"/>
+                </a:solidFill>
+                <a:latin typeface="Consolas"/>
+              </a:rPr>
+              <a:t>episodic recall</a:t>
+            </a:r>
+          </a:p>
+        </p:txBody>
+      </p:sp>
+      <p:sp>
+        <p:nvSpPr>
+          <p:cNvPr id="55" name="TextBox 54"/>
+          <p:cNvSpPr txBox="1"/>
+          <p:nvPr/>
+        </p:nvSpPr>
+        <p:spPr>
+          <a:xfrm>
+            <a:off x="9308592" y="4123944"/>
+            <a:ext cx="1536192" cy="219456"/>
+          </a:xfrm>
+          <a:prstGeom prst="rect">
+            <a:avLst/>
+          </a:prstGeom>
+          <a:noFill/>
+        </p:spPr>
+        <p:txBody>
+          <a:bodyPr wrap="square" lIns="0" rIns="0" tIns="0" bIns="0">
+            <a:spAutoFit/>
+          </a:bodyPr>
+          <a:lstStyle/>
+          <a:p>
+            <a:pPr algn="l">
+              <a:lnSpc>
+                <a:spcPct val="125000"/>
+              </a:lnSpc>
+              <a:spcAft>
+                <a:spcPts val="600"/>
+              </a:spcAft>
+            </a:pPr>
+            <a:r>
               <a:rPr sz="850" b="0">
                 <a:solidFill>
                   <a:srgbClr val="A1A1AA"/>
@@ -8973,14 +9099,14 @@
       </p:sp>
       <p:sp>
         <p:nvSpPr>
-          <p:cNvPr id="53" name="TextBox 52"/>
-          <p:cNvSpPr txBox="1"/>
-          <p:nvPr/>
-        </p:nvSpPr>
-        <p:spPr>
-          <a:xfrm>
-            <a:off x="10515600" y="4123944"/>
-            <a:ext cx="1097280" cy="219456"/>
+          <p:cNvPr id="56" name="TextBox 55"/>
+          <p:cNvSpPr txBox="1"/>
+          <p:nvPr/>
+        </p:nvSpPr>
+        <p:spPr>
+          <a:xfrm>
+            <a:off x="10899648" y="4133088"/>
+            <a:ext cx="731520" cy="219456"/>
           </a:xfrm>
           <a:prstGeom prst="rect">
             <a:avLst/>
@@ -9002,20 +9128,20 @@
               </a:spcAft>
             </a:pPr>
             <a:r>
-              <a:rPr sz="800" b="0">
+              <a:rPr sz="750" b="0">
                 <a:solidFill>
                   <a:srgbClr val="71717A"/>
                 </a:solidFill>
                 <a:latin typeface="Inter"/>
               </a:rPr>
-              <a:t>kept forever</a:t>
-            </a:r>
-          </a:p>
-        </p:txBody>
-      </p:sp>
-      <p:sp>
-        <p:nvSpPr>
-          <p:cNvPr id="54" name="Rounded Rectangle 53"/>
+              <a:t>kept</a:t>
+            </a:r>
+          </a:p>
+        </p:txBody>
+      </p:sp>
+      <p:sp>
+        <p:nvSpPr>
+          <p:cNvPr id="57" name="Rounded Rectangle 56"/>
           <p:cNvSpPr/>
           <p:nvPr/>
         </p:nvSpPr>
@@ -9061,7 +9187,7 @@
       </p:sp>
       <p:sp>
         <p:nvSpPr>
-          <p:cNvPr id="55" name="Rounded Rectangle 54"/>
+          <p:cNvPr id="58" name="Rounded Rectangle 57"/>
           <p:cNvSpPr/>
           <p:nvPr/>
         </p:nvSpPr>
@@ -9107,14 +9233,14 @@
       </p:sp>
       <p:sp>
         <p:nvSpPr>
-          <p:cNvPr id="56" name="TextBox 55"/>
+          <p:cNvPr id="59" name="TextBox 58"/>
           <p:cNvSpPr txBox="1"/>
           <p:nvPr/>
         </p:nvSpPr>
         <p:spPr>
           <a:xfrm>
             <a:off x="6565392" y="4462271"/>
-            <a:ext cx="1371600" cy="219456"/>
+            <a:ext cx="1170432" cy="219456"/>
           </a:xfrm>
           <a:prstGeom prst="rect">
             <a:avLst/>
@@ -9149,14 +9275,14 @@
       </p:sp>
       <p:sp>
         <p:nvSpPr>
-          <p:cNvPr id="57" name="TextBox 56"/>
-          <p:cNvSpPr txBox="1"/>
-          <p:nvPr/>
-        </p:nvSpPr>
-        <p:spPr>
-          <a:xfrm>
-            <a:off x="8092440" y="4462271"/>
-            <a:ext cx="2377440" cy="219456"/>
+          <p:cNvPr id="60" name="TextBox 59"/>
+          <p:cNvSpPr txBox="1"/>
+          <p:nvPr/>
+        </p:nvSpPr>
+        <p:spPr>
+          <a:xfrm>
+            <a:off x="7772400" y="4471415"/>
+            <a:ext cx="1481328" cy="219456"/>
           </a:xfrm>
           <a:prstGeom prst="rect">
             <a:avLst/>
@@ -9178,27 +9304,69 @@
               </a:spcAft>
             </a:pPr>
             <a:r>
+              <a:rPr sz="750" b="0">
+                <a:solidFill>
+                  <a:srgbClr val="0EA5E9"/>
+                </a:solidFill>
+                <a:latin typeface="Consolas"/>
+              </a:rPr>
+              <a:t>semantic memory</a:t>
+            </a:r>
+          </a:p>
+        </p:txBody>
+      </p:sp>
+      <p:sp>
+        <p:nvSpPr>
+          <p:cNvPr id="61" name="TextBox 60"/>
+          <p:cNvSpPr txBox="1"/>
+          <p:nvPr/>
+        </p:nvSpPr>
+        <p:spPr>
+          <a:xfrm>
+            <a:off x="9308592" y="4462271"/>
+            <a:ext cx="1536192" cy="219456"/>
+          </a:xfrm>
+          <a:prstGeom prst="rect">
+            <a:avLst/>
+          </a:prstGeom>
+          <a:noFill/>
+        </p:spPr>
+        <p:txBody>
+          <a:bodyPr wrap="square" lIns="0" rIns="0" tIns="0" bIns="0">
+            <a:spAutoFit/>
+          </a:bodyPr>
+          <a:lstStyle/>
+          <a:p>
+            <a:pPr algn="l">
+              <a:lnSpc>
+                <a:spcPct val="125000"/>
+              </a:lnSpc>
+              <a:spcAft>
+                <a:spcPts val="600"/>
+              </a:spcAft>
+            </a:pPr>
+            <a:r>
               <a:rPr sz="850" b="0">
                 <a:solidFill>
                   <a:srgbClr val="A1A1AA"/>
                 </a:solidFill>
                 <a:latin typeface="Inter"/>
               </a:rPr>
-              <a:t>what each crime pattern means</a:t>
-            </a:r>
-          </a:p>
-        </p:txBody>
-      </p:sp>
-      <p:sp>
-        <p:nvSpPr>
-          <p:cNvPr id="58" name="TextBox 57"/>
-          <p:cNvSpPr txBox="1"/>
-          <p:nvPr/>
-        </p:nvSpPr>
-        <p:spPr>
-          <a:xfrm>
-            <a:off x="10515600" y="4462271"/>
-            <a:ext cx="1097280" cy="219456"/>
+              <a:t>what each pattern means</a:t>
+            </a:r>
+          </a:p>
+        </p:txBody>
+      </p:sp>
+      <p:sp>
+        <p:nvSpPr>
+          <p:cNvPr id="62" name="TextBox 61"/>
+          <p:cNvSpPr txBox="1"/>
+          <p:nvPr/>
+        </p:nvSpPr>
+        <p:spPr>
+          <a:xfrm>
+            <a:off x="10899648" y="4471415"/>
+            <a:ext cx="731520" cy="219456"/>
           </a:xfrm>
           <a:prstGeom prst="rect">
             <a:avLst/>
@@ -9220,20 +9388,20 @@
               </a:spcAft>
             </a:pPr>
             <a:r>
-              <a:rPr sz="800" b="0">
+              <a:rPr sz="750" b="0">
                 <a:solidFill>
                   <a:srgbClr val="71717A"/>
                 </a:solidFill>
                 <a:latin typeface="Inter"/>
               </a:rPr>
-              <a:t>fixed reference</a:t>
-            </a:r>
-          </a:p>
-        </p:txBody>
-      </p:sp>
-      <p:sp>
-        <p:nvSpPr>
-          <p:cNvPr id="59" name="Rounded Rectangle 58"/>
+              <a:t>fixed</a:t>
+            </a:r>
+          </a:p>
+        </p:txBody>
+      </p:sp>
+      <p:sp>
+        <p:nvSpPr>
+          <p:cNvPr id="63" name="Rounded Rectangle 62"/>
           <p:cNvSpPr/>
           <p:nvPr/>
         </p:nvSpPr>
@@ -9279,7 +9447,7 @@
       </p:sp>
       <p:sp>
         <p:nvSpPr>
-          <p:cNvPr id="60" name="Rounded Rectangle 59"/>
+          <p:cNvPr id="64" name="Rounded Rectangle 63"/>
           <p:cNvSpPr/>
           <p:nvPr/>
         </p:nvSpPr>
@@ -9325,14 +9493,14 @@
       </p:sp>
       <p:sp>
         <p:nvSpPr>
-          <p:cNvPr id="61" name="TextBox 60"/>
+          <p:cNvPr id="65" name="TextBox 64"/>
           <p:cNvSpPr txBox="1"/>
           <p:nvPr/>
         </p:nvSpPr>
         <p:spPr>
           <a:xfrm>
             <a:off x="6565392" y="4800600"/>
-            <a:ext cx="1371600" cy="219456"/>
+            <a:ext cx="1170432" cy="219456"/>
           </a:xfrm>
           <a:prstGeom prst="rect">
             <a:avLst/>
@@ -9367,14 +9535,14 @@
       </p:sp>
       <p:sp>
         <p:nvSpPr>
-          <p:cNvPr id="62" name="TextBox 61"/>
-          <p:cNvSpPr txBox="1"/>
-          <p:nvPr/>
-        </p:nvSpPr>
-        <p:spPr>
-          <a:xfrm>
-            <a:off x="8092440" y="4800600"/>
-            <a:ext cx="2377440" cy="219456"/>
+          <p:cNvPr id="66" name="TextBox 65"/>
+          <p:cNvSpPr txBox="1"/>
+          <p:nvPr/>
+        </p:nvSpPr>
+        <p:spPr>
+          <a:xfrm>
+            <a:off x="7772400" y="4809744"/>
+            <a:ext cx="1481328" cy="219456"/>
           </a:xfrm>
           <a:prstGeom prst="rect">
             <a:avLst/>
@@ -9396,27 +9564,69 @@
               </a:spcAft>
             </a:pPr>
             <a:r>
+              <a:rPr sz="750" b="0">
+                <a:solidFill>
+                  <a:srgbClr val="8B5CF6"/>
+                </a:solidFill>
+                <a:latin typeface="Consolas"/>
+              </a:rPr>
+              <a:t>procedural memory</a:t>
+            </a:r>
+          </a:p>
+        </p:txBody>
+      </p:sp>
+      <p:sp>
+        <p:nvSpPr>
+          <p:cNvPr id="67" name="TextBox 66"/>
+          <p:cNvSpPr txBox="1"/>
+          <p:nvPr/>
+        </p:nvSpPr>
+        <p:spPr>
+          <a:xfrm>
+            <a:off x="9308592" y="4800600"/>
+            <a:ext cx="1536192" cy="219456"/>
+          </a:xfrm>
+          <a:prstGeom prst="rect">
+            <a:avLst/>
+          </a:prstGeom>
+          <a:noFill/>
+        </p:spPr>
+        <p:txBody>
+          <a:bodyPr wrap="square" lIns="0" rIns="0" tIns="0" bIns="0">
+            <a:spAutoFit/>
+          </a:bodyPr>
+          <a:lstStyle/>
+          <a:p>
+            <a:pPr algn="l">
+              <a:lnSpc>
+                <a:spcPct val="125000"/>
+              </a:lnSpc>
+              <a:spcAft>
+                <a:spcPts val="600"/>
+              </a:spcAft>
+            </a:pPr>
+            <a:r>
               <a:rPr sz="850" b="0">
                 <a:solidFill>
                   <a:srgbClr val="A1A1AA"/>
                 </a:solidFill>
                 <a:latin typeface="Inter"/>
               </a:rPr>
-              <a:t>where we got it wrong before</a:t>
-            </a:r>
-          </a:p>
-        </p:txBody>
-      </p:sp>
-      <p:sp>
-        <p:nvSpPr>
-          <p:cNvPr id="63" name="TextBox 62"/>
-          <p:cNvSpPr txBox="1"/>
-          <p:nvPr/>
-        </p:nvSpPr>
-        <p:spPr>
-          <a:xfrm>
-            <a:off x="10515600" y="4800600"/>
-            <a:ext cx="1097280" cy="219456"/>
+              <a:t>where we got it wrong</a:t>
+            </a:r>
+          </a:p>
+        </p:txBody>
+      </p:sp>
+      <p:sp>
+        <p:nvSpPr>
+          <p:cNvPr id="68" name="TextBox 67"/>
+          <p:cNvSpPr txBox="1"/>
+          <p:nvPr/>
+        </p:nvSpPr>
+        <p:spPr>
+          <a:xfrm>
+            <a:off x="10899648" y="4809744"/>
+            <a:ext cx="731520" cy="219456"/>
           </a:xfrm>
           <a:prstGeom prst="rect">
             <a:avLst/>
@@ -9438,20 +9648,20 @@
               </a:spcAft>
             </a:pPr>
             <a:r>
-              <a:rPr sz="800" b="0">
+              <a:rPr sz="750" b="0">
                 <a:solidFill>
                   <a:srgbClr val="71717A"/>
                 </a:solidFill>
                 <a:latin typeface="Inter"/>
               </a:rPr>
-              <a:t>grows as people fix</a:t>
-            </a:r>
-          </a:p>
-        </p:txBody>
-      </p:sp>
-      <p:sp>
-        <p:nvSpPr>
-          <p:cNvPr id="64" name="Rounded Rectangle 63"/>
+              <a:t>grows</a:t>
+            </a:r>
+          </a:p>
+        </p:txBody>
+      </p:sp>
+      <p:sp>
+        <p:nvSpPr>
+          <p:cNvPr id="69" name="Rounded Rectangle 68"/>
           <p:cNvSpPr/>
           <p:nvPr/>
         </p:nvSpPr>
@@ -9499,7 +9709,7 @@
       </p:sp>
       <p:sp>
         <p:nvSpPr>
-          <p:cNvPr id="65" name="TextBox 64"/>
+          <p:cNvPr id="70" name="TextBox 69"/>
           <p:cNvSpPr txBox="1"/>
           <p:nvPr/>
         </p:nvSpPr>
@@ -9541,7 +9751,7 @@
       </p:sp>
       <p:sp>
         <p:nvSpPr>
-          <p:cNvPr id="66" name="TextBox 65"/>
+          <p:cNvPr id="71" name="TextBox 70"/>
           <p:cNvSpPr txBox="1"/>
           <p:nvPr/>
         </p:nvSpPr>
@@ -9619,7 +9829,7 @@
       </p:sp>
       <p:sp>
         <p:nvSpPr>
-          <p:cNvPr id="67" name="Rounded Rectangle 66"/>
+          <p:cNvPr id="72" name="Rounded Rectangle 71"/>
           <p:cNvSpPr/>
           <p:nvPr/>
         </p:nvSpPr>
@@ -9667,7 +9877,7 @@
       </p:sp>
       <p:sp>
         <p:nvSpPr>
-          <p:cNvPr id="68" name="TextBox 67"/>
+          <p:cNvPr id="73" name="TextBox 72"/>
           <p:cNvSpPr txBox="1"/>
           <p:nvPr/>
         </p:nvSpPr>
@@ -9709,7 +9919,7 @@
       </p:sp>
       <p:sp>
         <p:nvSpPr>
-          <p:cNvPr id="69" name="TextBox 68"/>
+          <p:cNvPr id="74" name="TextBox 73"/>
           <p:cNvSpPr txBox="1"/>
           <p:nvPr/>
         </p:nvSpPr>
@@ -13104,7 +13314,7 @@
                 </a:solidFill>
                 <a:latin typeface="Inter"/>
               </a:rPr>
-              <a:t>04 · WHERE PEOPLE COME IN</a:t>
+              <a:t>04 · HUMAN-IN-THE-LOOP · WHERE PEOPLE COME IN</a:t>
             </a:r>
           </a:p>
         </p:txBody>
@@ -14230,7 +14440,7 @@
         <p:spPr>
           <a:xfrm>
             <a:off x="6446520" y="3209544"/>
-            <a:ext cx="5065776" cy="219456"/>
+            <a:ext cx="2377440" cy="219456"/>
           </a:xfrm>
           <a:prstGeom prst="rect">
             <a:avLst/>
@@ -14271,26 +14481,68 @@
         </p:nvSpPr>
         <p:spPr>
           <a:xfrm>
+            <a:off x="8887968" y="3218688"/>
+            <a:ext cx="1417320" cy="219456"/>
+          </a:xfrm>
+          <a:prstGeom prst="rect">
+            <a:avLst/>
+          </a:prstGeom>
+          <a:noFill/>
+        </p:spPr>
+        <p:txBody>
+          <a:bodyPr wrap="square" lIns="0" rIns="0" tIns="0" bIns="0">
+            <a:spAutoFit/>
+          </a:bodyPr>
+          <a:lstStyle/>
+          <a:p>
+            <a:pPr algn="l">
+              <a:lnSpc>
+                <a:spcPct val="125000"/>
+              </a:lnSpc>
+              <a:spcAft>
+                <a:spcPts val="600"/>
+              </a:spcAft>
+            </a:pPr>
+            <a:r>
+              <a:rPr sz="750" b="0">
+                <a:solidFill>
+                  <a:srgbClr val="14B8A6"/>
+                </a:solidFill>
+                <a:latin typeface="Consolas"/>
+              </a:rPr>
+              <a:t>episodic memory</a:t>
+            </a:r>
+          </a:p>
+        </p:txBody>
+      </p:sp>
+      <p:sp>
+        <p:nvSpPr>
+          <p:cNvPr id="29" name="TextBox 28"/>
+          <p:cNvSpPr txBox="1"/>
+          <p:nvPr/>
+        </p:nvSpPr>
+        <p:spPr>
+          <a:xfrm>
             <a:off x="6446520" y="3410712"/>
-            <a:ext cx="5084064" cy="164592"/>
-          </a:xfrm>
-          <a:prstGeom prst="rect">
-            <a:avLst/>
-          </a:prstGeom>
-          <a:noFill/>
-        </p:spPr>
-        <p:txBody>
-          <a:bodyPr wrap="square" lIns="0" rIns="0" tIns="0" bIns="0">
-            <a:spAutoFit/>
-          </a:bodyPr>
-          <a:lstStyle/>
-          <a:p>
-            <a:pPr algn="l">
-              <a:lnSpc>
-                <a:spcPct val="116000"/>
-              </a:lnSpc>
-              <a:spcAft>
-                <a:spcPts val="200"/>
+            <a:ext cx="5120640" cy="201168"/>
+          </a:xfrm>
+          <a:prstGeom prst="rect">
+            <a:avLst/>
+          </a:prstGeom>
+          <a:noFill/>
+        </p:spPr>
+        <p:txBody>
+          <a:bodyPr wrap="square" lIns="0" rIns="0" tIns="0" bIns="0">
+            <a:spAutoFit/>
+          </a:bodyPr>
+          <a:lstStyle/>
+          <a:p>
+            <a:pPr algn="l">
+              <a:lnSpc>
+                <a:spcPct val="125000"/>
+              </a:lnSpc>
+              <a:spcAft>
+                <a:spcPts val="600"/>
               </a:spcAft>
             </a:pPr>
             <a:r>
@@ -14307,7 +14559,7 @@
       </p:sp>
       <p:sp>
         <p:nvSpPr>
-          <p:cNvPr id="29" name="Rounded Rectangle 28"/>
+          <p:cNvPr id="30" name="Rounded Rectangle 29"/>
           <p:cNvSpPr/>
           <p:nvPr/>
         </p:nvSpPr>
@@ -14355,7 +14607,7 @@
       </p:sp>
       <p:sp>
         <p:nvSpPr>
-          <p:cNvPr id="30" name="Rectangle 29"/>
+          <p:cNvPr id="31" name="Rectangle 30"/>
           <p:cNvSpPr/>
           <p:nvPr/>
         </p:nvSpPr>
@@ -14399,14 +14651,14 @@
       </p:sp>
       <p:sp>
         <p:nvSpPr>
-          <p:cNvPr id="31" name="TextBox 30"/>
+          <p:cNvPr id="32" name="TextBox 31"/>
           <p:cNvSpPr txBox="1"/>
           <p:nvPr/>
         </p:nvSpPr>
         <p:spPr>
           <a:xfrm>
             <a:off x="6446520" y="3758184"/>
-            <a:ext cx="5065776" cy="219456"/>
+            <a:ext cx="2377440" cy="219456"/>
           </a:xfrm>
           <a:prstGeom prst="rect">
             <a:avLst/>
@@ -14441,32 +14693,74 @@
       </p:sp>
       <p:sp>
         <p:nvSpPr>
-          <p:cNvPr id="32" name="TextBox 31"/>
+          <p:cNvPr id="33" name="TextBox 32"/>
+          <p:cNvSpPr txBox="1"/>
+          <p:nvPr/>
+        </p:nvSpPr>
+        <p:spPr>
+          <a:xfrm>
+            <a:off x="8887968" y="3767328"/>
+            <a:ext cx="1417320" cy="219456"/>
+          </a:xfrm>
+          <a:prstGeom prst="rect">
+            <a:avLst/>
+          </a:prstGeom>
+          <a:noFill/>
+        </p:spPr>
+        <p:txBody>
+          <a:bodyPr wrap="square" lIns="0" rIns="0" tIns="0" bIns="0">
+            <a:spAutoFit/>
+          </a:bodyPr>
+          <a:lstStyle/>
+          <a:p>
+            <a:pPr algn="l">
+              <a:lnSpc>
+                <a:spcPct val="125000"/>
+              </a:lnSpc>
+              <a:spcAft>
+                <a:spcPts val="600"/>
+              </a:spcAft>
+            </a:pPr>
+            <a:r>
+              <a:rPr sz="750" b="0">
+                <a:solidFill>
+                  <a:srgbClr val="8B5CF6"/>
+                </a:solidFill>
+                <a:latin typeface="Consolas"/>
+              </a:rPr>
+              <a:t>procedural memory</a:t>
+            </a:r>
+          </a:p>
+        </p:txBody>
+      </p:sp>
+      <p:sp>
+        <p:nvSpPr>
+          <p:cNvPr id="34" name="TextBox 33"/>
           <p:cNvSpPr txBox="1"/>
           <p:nvPr/>
         </p:nvSpPr>
         <p:spPr>
           <a:xfrm>
             <a:off x="6446520" y="3959352"/>
-            <a:ext cx="5084064" cy="164592"/>
-          </a:xfrm>
-          <a:prstGeom prst="rect">
-            <a:avLst/>
-          </a:prstGeom>
-          <a:noFill/>
-        </p:spPr>
-        <p:txBody>
-          <a:bodyPr wrap="square" lIns="0" rIns="0" tIns="0" bIns="0">
-            <a:spAutoFit/>
-          </a:bodyPr>
-          <a:lstStyle/>
-          <a:p>
-            <a:pPr algn="l">
-              <a:lnSpc>
-                <a:spcPct val="116000"/>
-              </a:lnSpc>
-              <a:spcAft>
-                <a:spcPts val="200"/>
+            <a:ext cx="5120640" cy="201168"/>
+          </a:xfrm>
+          <a:prstGeom prst="rect">
+            <a:avLst/>
+          </a:prstGeom>
+          <a:noFill/>
+        </p:spPr>
+        <p:txBody>
+          <a:bodyPr wrap="square" lIns="0" rIns="0" tIns="0" bIns="0">
+            <a:spAutoFit/>
+          </a:bodyPr>
+          <a:lstStyle/>
+          <a:p>
+            <a:pPr algn="l">
+              <a:lnSpc>
+                <a:spcPct val="125000"/>
+              </a:lnSpc>
+              <a:spcAft>
+                <a:spcPts val="600"/>
               </a:spcAft>
             </a:pPr>
             <a:r>
@@ -14483,7 +14777,7 @@
       </p:sp>
       <p:sp>
         <p:nvSpPr>
-          <p:cNvPr id="33" name="Rounded Rectangle 32"/>
+          <p:cNvPr id="35" name="Rounded Rectangle 34"/>
           <p:cNvSpPr/>
           <p:nvPr/>
         </p:nvSpPr>
@@ -14531,7 +14825,7 @@
       </p:sp>
       <p:sp>
         <p:nvSpPr>
-          <p:cNvPr id="34" name="Rectangle 33"/>
+          <p:cNvPr id="36" name="Rectangle 35"/>
           <p:cNvSpPr/>
           <p:nvPr/>
         </p:nvSpPr>
@@ -14575,14 +14869,14 @@
       </p:sp>
       <p:sp>
         <p:nvSpPr>
-          <p:cNvPr id="35" name="TextBox 34"/>
+          <p:cNvPr id="37" name="TextBox 36"/>
           <p:cNvSpPr txBox="1"/>
           <p:nvPr/>
         </p:nvSpPr>
         <p:spPr>
           <a:xfrm>
             <a:off x="6446520" y="4306824"/>
-            <a:ext cx="5065776" cy="219456"/>
+            <a:ext cx="2377440" cy="219456"/>
           </a:xfrm>
           <a:prstGeom prst="rect">
             <a:avLst/>
@@ -14617,32 +14911,74 @@
       </p:sp>
       <p:sp>
         <p:nvSpPr>
-          <p:cNvPr id="36" name="TextBox 35"/>
+          <p:cNvPr id="38" name="TextBox 37"/>
+          <p:cNvSpPr txBox="1"/>
+          <p:nvPr/>
+        </p:nvSpPr>
+        <p:spPr>
+          <a:xfrm>
+            <a:off x="8887968" y="4315968"/>
+            <a:ext cx="1417320" cy="219456"/>
+          </a:xfrm>
+          <a:prstGeom prst="rect">
+            <a:avLst/>
+          </a:prstGeom>
+          <a:noFill/>
+        </p:spPr>
+        <p:txBody>
+          <a:bodyPr wrap="square" lIns="0" rIns="0" tIns="0" bIns="0">
+            <a:spAutoFit/>
+          </a:bodyPr>
+          <a:lstStyle/>
+          <a:p>
+            <a:pPr algn="l">
+              <a:lnSpc>
+                <a:spcPct val="125000"/>
+              </a:lnSpc>
+              <a:spcAft>
+                <a:spcPts val="600"/>
+              </a:spcAft>
+            </a:pPr>
+            <a:r>
+              <a:rPr sz="750" b="0">
+                <a:solidFill>
+                  <a:srgbClr val="0EA5E9"/>
+                </a:solidFill>
+                <a:latin typeface="Consolas"/>
+              </a:rPr>
+              <a:t>per-customer history</a:t>
+            </a:r>
+          </a:p>
+        </p:txBody>
+      </p:sp>
+      <p:sp>
+        <p:nvSpPr>
+          <p:cNvPr id="39" name="TextBox 38"/>
           <p:cNvSpPr txBox="1"/>
           <p:nvPr/>
         </p:nvSpPr>
         <p:spPr>
           <a:xfrm>
             <a:off x="6446520" y="4507992"/>
-            <a:ext cx="5084064" cy="164592"/>
-          </a:xfrm>
-          <a:prstGeom prst="rect">
-            <a:avLst/>
-          </a:prstGeom>
-          <a:noFill/>
-        </p:spPr>
-        <p:txBody>
-          <a:bodyPr wrap="square" lIns="0" rIns="0" tIns="0" bIns="0">
-            <a:spAutoFit/>
-          </a:bodyPr>
-          <a:lstStyle/>
-          <a:p>
-            <a:pPr algn="l">
-              <a:lnSpc>
-                <a:spcPct val="116000"/>
-              </a:lnSpc>
-              <a:spcAft>
-                <a:spcPts val="200"/>
+            <a:ext cx="5120640" cy="201168"/>
+          </a:xfrm>
+          <a:prstGeom prst="rect">
+            <a:avLst/>
+          </a:prstGeom>
+          <a:noFill/>
+        </p:spPr>
+        <p:txBody>
+          <a:bodyPr wrap="square" lIns="0" rIns="0" tIns="0" bIns="0">
+            <a:spAutoFit/>
+          </a:bodyPr>
+          <a:lstStyle/>
+          <a:p>
+            <a:pPr algn="l">
+              <a:lnSpc>
+                <a:spcPct val="125000"/>
+              </a:lnSpc>
+              <a:spcAft>
+                <a:spcPts val="600"/>
               </a:spcAft>
             </a:pPr>
             <a:r>
@@ -14659,7 +14995,7 @@
       </p:sp>
       <p:sp>
         <p:nvSpPr>
-          <p:cNvPr id="37" name="TextBox 36"/>
+          <p:cNvPr id="40" name="TextBox 39"/>
           <p:cNvSpPr txBox="1"/>
           <p:nvPr/>
         </p:nvSpPr>
@@ -14719,7 +15055,7 @@
       </p:sp>
       <p:sp>
         <p:nvSpPr>
-          <p:cNvPr id="38" name="Rounded Rectangle 37"/>
+          <p:cNvPr id="41" name="Rounded Rectangle 40"/>
           <p:cNvSpPr/>
           <p:nvPr/>
         </p:nvSpPr>
@@ -14767,7 +15103,7 @@
       </p:sp>
       <p:sp>
         <p:nvSpPr>
-          <p:cNvPr id="39" name="TextBox 38"/>
+          <p:cNvPr id="42" name="TextBox 41"/>
           <p:cNvSpPr txBox="1"/>
           <p:nvPr/>
         </p:nvSpPr>
@@ -14809,7 +15145,7 @@
       </p:sp>
       <p:sp>
         <p:nvSpPr>
-          <p:cNvPr id="40" name="TextBox 39"/>
+          <p:cNvPr id="43" name="TextBox 42"/>
           <p:cNvSpPr txBox="1"/>
           <p:nvPr/>
         </p:nvSpPr>
